--- a/doc-mk/DP2_Prefill_Decode_Background.pptx
+++ b/doc-mk/DP2_Prefill_Decode_Background.pptx
@@ -863,27 +863,32 @@
           <a:p/>
           <a:p>
             <a:r>
-              <a:t>[Turn 예시 - 실행 위치가 매번 바뀌는 이유]</a:t>
-            </a:r>
-          </a:p>
-          <a:p>
-            <a:r>
-              <a:t>Turn 1은 첫 질문이라 옮길 KV 캐시가 없어 기본 경로인 P 노드 Prefill이 맞습니다.</a:t>
-            </a:r>
-          </a:p>
-          <a:p>
-            <a:r>
-              <a:t>Turn 2는 Tool 결과 100 토큰만 추가된 상황입니다. 할 일이 적은데 P로 보내면 KV 전송 비용과 P 노드 대기 시간이 연산 이득보다 커집니다. KV가 이미 D에 있으므로 D에서 바로 처리하는 것이 유리합니다.</a:t>
-            </a:r>
-          </a:p>
-          <a:p>
-            <a:r>
-              <a:t>Turn 3은 Tool 결과가 1,000 토큰으로 큽니다. 이 정도 Prefill을 D에서 수행하면 D가 돌리고 있던 다른 사용자의 Decode가 멈춥니다. 마침 P 노드가 한가하므로 P로 보내는 편이 전체적으로 이득입니다.</a:t>
-            </a:r>
-          </a:p>
-          <a:p>
-            <a:r>
-              <a:t>세 경우 모두 같은 Agent 대화이지만 판단 결과가 다릅니다. 고정된 규칙 하나로는 대응할 수 없고, 입력 크기·KV 캐시 위치·노드 부하를 함께 보는 결정 구조가 필요하다는 것이 아래 설계 쟁점입니다.</a:t>
+              <a:t>[Turn 예시 - 왜 Prefill 실행 위치가 매번 문제가 되는가]</a:t>
+            </a:r>
+          </a:p>
+          <a:p>
+            <a:r>
+              <a:t>먼저 P 노드와 D 노드는 물리적으로 분리된 서버이고, 그 사이를 넘는 KV 캐시에는 전송 비용이 붙습니다. 그림의 점선이 그 경계입니다.</a:t>
+            </a:r>
+          </a:p>
+          <a:p>
+            <a:r>
+              <a:t>Turn 1에서는 P 노드가 사용자 질문 2,000 토큰을 Prefill 하고, 만들어진 KV 캐시가 D 노드로 넘어가 Decode가 돕니다. 이 시점부터 History KV는 D 노드에 있습니다.</a:t>
+            </a:r>
+          </a:p>
+          <a:p>
+            <a:r>
+              <a:t>Turn 2에서 Tool 결과가 도착하면 선택지가 두 개 생깁니다. ① D에서 그대로 Prefill 하면 KV를 옮길 필요가 없어 전송 비용이 0이지만, D가 돌리고 있던 Decode와 GPU 자원을 다투게 되어 진행 중인 응답이 느려집니다. ② History KV를 P로 보내 P에서 Prefill 하면 D의 Decode는 그대로 두고 P의 연산 자원을 쓸 수 있지만, History KV 크기만큼 전송 비용을 새로 냅니다.</a:t>
+            </a:r>
+          </a:p>
+          <a:p>
+            <a:r>
+              <a:t>핵심은 어느 쪽이 싼지가 고정되어 있지 않다는 점입니다. Tool 결과가 작으면 옮겨봐야 전송비가 연산 이득보다 크므로 ①이 낫고, Tool 결과가 크거나 D가 혼잡하면 전송비를 내더라도 ②가 낫습니다. History KV가 커질수록 ②의 전송 비용도 함께 커지므로 Turn이 진행될수록 판단이 또 달라집니다.</a:t>
+            </a:r>
+          </a:p>
+          <a:p>
+            <a:r>
+              <a:t>즉 Tool 결과 크기, History KV 크기, P/D 노드 부하가 매 Turn 바뀌기 때문에 고정된 규칙 하나로는 대응할 수 없고, 이것이 아래 설계 쟁점에서 말하는 동적 결정 구조가 필요한 이유입니다.</a:t>
             </a:r>
           </a:p>
         </p:txBody>
@@ -6895,670 +6900,12 @@
         </p:nvSpPr>
         <p:spPr>
           <a:xfrm>
-            <a:off x="347472" y="2286000"/>
-            <a:ext cx="3520440" cy="2788920"/>
+            <a:off x="347472" y="2542032"/>
+            <a:ext cx="804672" cy="1024128"/>
           </a:xfrm>
           <a:prstGeom prst="roundRect">
             <a:avLst>
-              <a:gd name="adj" fmla="val 3500"/>
-            </a:avLst>
-          </a:prstGeom>
-          <a:solidFill>
-            <a:srgbClr val="FFFFFF"/>
-          </a:solidFill>
-          <a:ln w="12700">
-            <a:solidFill>
-              <a:srgbClr val="D9D9D9"/>
-            </a:solidFill>
-          </a:ln>
-          <a:effectLst/>
-        </p:spPr>
-        <p:style>
-          <a:lnRef idx="1">
-            <a:schemeClr val="accent1"/>
-          </a:lnRef>
-          <a:fillRef idx="3">
-            <a:schemeClr val="accent1"/>
-          </a:fillRef>
-          <a:effectRef idx="2">
-            <a:schemeClr val="accent1"/>
-          </a:effectRef>
-          <a:fontRef idx="minor">
-            <a:schemeClr val="lt1"/>
-          </a:fontRef>
-        </p:style>
-        <p:txBody>
-          <a:bodyPr rtlCol="0" anchor="ctr" wrap="square" lIns="54864" rIns="54864" tIns="0" bIns="0"/>
-          <a:lstStyle/>
-          <a:p>
-            <a:pPr algn="l">
-              <a:lnSpc>
-                <a:spcPct val="100000"/>
-              </a:lnSpc>
-              <a:spcAft>
-                <a:spcPts val="0"/>
-              </a:spcAft>
-            </a:pPr>
-            <a:r>
-              <a:rPr sz="100" b="0" i="0">
-                <a:solidFill>
-                  <a:srgbClr val="000000"/>
-                </a:solidFill>
-                <a:latin typeface="맑은 고딕"/>
-                <a:ea typeface="맑은 고딕"/>
-                <a:cs typeface="맑은 고딕"/>
-              </a:rPr>
-              <a:t/>
-            </a:r>
-          </a:p>
-        </p:txBody>
-      </p:sp>
-      <p:sp>
-        <p:nvSpPr>
-          <p:cNvPr id="9063" name="Rounded Rectangle 9062"/>
-          <p:cNvSpPr/>
-          <p:nvPr/>
-        </p:nvSpPr>
-        <p:spPr>
-          <a:xfrm>
-            <a:off x="347472" y="2286000"/>
-            <a:ext cx="3520440" cy="310896"/>
-          </a:xfrm>
-          <a:prstGeom prst="roundRect">
-            <a:avLst>
-              <a:gd name="adj" fmla="val 10000"/>
-            </a:avLst>
-          </a:prstGeom>
-          <a:solidFill>
-            <a:srgbClr val="1F3864"/>
-          </a:solidFill>
-          <a:ln>
-            <a:noFill/>
-          </a:ln>
-          <a:effectLst/>
-        </p:spPr>
-        <p:style>
-          <a:lnRef idx="1">
-            <a:schemeClr val="accent1"/>
-          </a:lnRef>
-          <a:fillRef idx="3">
-            <a:schemeClr val="accent1"/>
-          </a:fillRef>
-          <a:effectRef idx="2">
-            <a:schemeClr val="accent1"/>
-          </a:effectRef>
-          <a:fontRef idx="minor">
-            <a:schemeClr val="lt1"/>
-          </a:fontRef>
-        </p:style>
-        <p:txBody>
-          <a:bodyPr rtlCol="0" anchor="ctr" wrap="square" lIns="54864" rIns="54864" tIns="0" bIns="0"/>
-          <a:lstStyle/>
-          <a:p>
-            <a:pPr algn="ctr">
-              <a:lnSpc>
-                <a:spcPct val="100000"/>
-              </a:lnSpc>
-              <a:spcAft>
-                <a:spcPts val="0"/>
-              </a:spcAft>
-            </a:pPr>
-            <a:r>
-              <a:rPr sz="1050" b="1" i="0">
-                <a:solidFill>
-                  <a:srgbClr val="FFFFFF"/>
-                </a:solidFill>
-                <a:latin typeface="맑은 고딕"/>
-                <a:ea typeface="맑은 고딕"/>
-                <a:cs typeface="맑은 고딕"/>
-              </a:rPr>
-              <a:t>Turn 1</a:t>
-            </a:r>
-            <a:r>
-              <a:rPr sz="900" b="0" i="0">
-                <a:solidFill>
-                  <a:srgbClr val="FFFFFF"/>
-                </a:solidFill>
-                <a:latin typeface="맑은 고딕"/>
-                <a:ea typeface="맑은 고딕"/>
-                <a:cs typeface="맑은 고딕"/>
-              </a:rPr>
-              <a:t>   ·   사용자의 첫 질문</a:t>
-            </a:r>
-          </a:p>
-        </p:txBody>
-      </p:sp>
-      <p:sp>
-        <p:nvSpPr>
-          <p:cNvPr id="9064" name="TextBox 9063"/>
-          <p:cNvSpPr txBox="1"/>
-          <p:nvPr/>
-        </p:nvSpPr>
-        <p:spPr>
-          <a:xfrm>
-            <a:off x="493776" y="2670048"/>
-            <a:ext cx="3227832" cy="292608"/>
-          </a:xfrm>
-          <a:prstGeom prst="rect">
-            <a:avLst/>
-          </a:prstGeom>
-          <a:noFill/>
-        </p:spPr>
-        <p:txBody>
-          <a:bodyPr wrap="square" lIns="0" rIns="0" tIns="0" bIns="0" anchor="t">
-            <a:spAutoFit/>
-          </a:bodyPr>
-          <a:lstStyle/>
-          <a:p>
-            <a:pPr algn="l">
-              <a:lnSpc>
-                <a:spcPct val="115000"/>
-              </a:lnSpc>
-              <a:spcAft>
-                <a:spcPts val="0"/>
-              </a:spcAft>
-            </a:pPr>
-            <a:r>
-              <a:rPr sz="800" b="1" i="0">
-                <a:solidFill>
-                  <a:srgbClr val="808080"/>
-                </a:solidFill>
-                <a:latin typeface="맑은 고딕"/>
-                <a:ea typeface="맑은 고딕"/>
-                <a:cs typeface="맑은 고딕"/>
-              </a:rPr>
-              <a:t>입력 :  </a:t>
-            </a:r>
-            <a:r>
-              <a:rPr sz="800" b="0" i="0">
-                <a:solidFill>
-                  <a:srgbClr val="595959"/>
-                </a:solidFill>
-                <a:latin typeface="맑은 고딕"/>
-                <a:ea typeface="맑은 고딕"/>
-                <a:cs typeface="맑은 고딕"/>
-              </a:rPr>
-              <a:t>사용자 질문 2,000 토큰  (처음이라 전체를 Prefill)</a:t>
-            </a:r>
-          </a:p>
-        </p:txBody>
-      </p:sp>
-      <p:sp>
-        <p:nvSpPr>
-          <p:cNvPr id="9065" name="Rounded Rectangle 9064"/>
-          <p:cNvSpPr/>
-          <p:nvPr/>
-        </p:nvSpPr>
-        <p:spPr>
-          <a:xfrm>
-            <a:off x="493776" y="3035808"/>
-            <a:ext cx="3227832" cy="1005840"/>
-          </a:xfrm>
-          <a:prstGeom prst="roundRect">
-            <a:avLst>
-              <a:gd name="adj" fmla="val 6000"/>
-            </a:avLst>
-          </a:prstGeom>
-          <a:solidFill>
-            <a:srgbClr val="F7F9FC"/>
-          </a:solidFill>
-          <a:ln w="9525">
-            <a:solidFill>
-              <a:srgbClr val="D9D9D9"/>
-            </a:solidFill>
-          </a:ln>
-          <a:effectLst/>
-        </p:spPr>
-        <p:style>
-          <a:lnRef idx="1">
-            <a:schemeClr val="accent1"/>
-          </a:lnRef>
-          <a:fillRef idx="3">
-            <a:schemeClr val="accent1"/>
-          </a:fillRef>
-          <a:effectRef idx="2">
-            <a:schemeClr val="accent1"/>
-          </a:effectRef>
-          <a:fontRef idx="minor">
-            <a:schemeClr val="lt1"/>
-          </a:fontRef>
-        </p:style>
-        <p:txBody>
-          <a:bodyPr rtlCol="0" anchor="ctr" wrap="square" lIns="54864" rIns="54864" tIns="0" bIns="0"/>
-          <a:lstStyle/>
-          <a:p>
-            <a:pPr algn="l">
-              <a:lnSpc>
-                <a:spcPct val="100000"/>
-              </a:lnSpc>
-              <a:spcAft>
-                <a:spcPts val="0"/>
-              </a:spcAft>
-            </a:pPr>
-            <a:r>
-              <a:rPr sz="100" b="0" i="0">
-                <a:solidFill>
-                  <a:srgbClr val="000000"/>
-                </a:solidFill>
-                <a:latin typeface="맑은 고딕"/>
-                <a:ea typeface="맑은 고딕"/>
-                <a:cs typeface="맑은 고딕"/>
-              </a:rPr>
-              <a:t/>
-            </a:r>
-          </a:p>
-        </p:txBody>
-      </p:sp>
-      <p:sp>
-        <p:nvSpPr>
-          <p:cNvPr id="9066" name="TextBox 9065"/>
-          <p:cNvSpPr txBox="1"/>
-          <p:nvPr/>
-        </p:nvSpPr>
-        <p:spPr>
-          <a:xfrm>
-            <a:off x="603504" y="3099815"/>
-            <a:ext cx="3008376" cy="164592"/>
-          </a:xfrm>
-          <a:prstGeom prst="rect">
-            <a:avLst/>
-          </a:prstGeom>
-          <a:noFill/>
-        </p:spPr>
-        <p:txBody>
-          <a:bodyPr wrap="square" lIns="0" rIns="0" tIns="0" bIns="0" anchor="t">
-            <a:spAutoFit/>
-          </a:bodyPr>
-          <a:lstStyle/>
-          <a:p>
-            <a:pPr algn="l">
-              <a:lnSpc>
-                <a:spcPct val="100000"/>
-              </a:lnSpc>
-              <a:spcAft>
-                <a:spcPts val="0"/>
-              </a:spcAft>
-            </a:pPr>
-            <a:r>
-              <a:rPr sz="750" b="1" i="0">
-                <a:solidFill>
-                  <a:srgbClr val="808080"/>
-                </a:solidFill>
-                <a:latin typeface="맑은 고딕"/>
-                <a:ea typeface="맑은 고딕"/>
-                <a:cs typeface="맑은 고딕"/>
-              </a:rPr>
-              <a:t>이 시점의 상태</a:t>
-            </a:r>
-          </a:p>
-        </p:txBody>
-      </p:sp>
-      <p:sp>
-        <p:nvSpPr>
-          <p:cNvPr id="9067" name="TextBox 9066"/>
-          <p:cNvSpPr txBox="1"/>
-          <p:nvPr/>
-        </p:nvSpPr>
-        <p:spPr>
-          <a:xfrm>
-            <a:off x="603504" y="3291839"/>
-            <a:ext cx="1024128" cy="173736"/>
-          </a:xfrm>
-          <a:prstGeom prst="rect">
-            <a:avLst/>
-          </a:prstGeom>
-          <a:noFill/>
-        </p:spPr>
-        <p:txBody>
-          <a:bodyPr wrap="square" lIns="0" rIns="0" tIns="0" bIns="0" anchor="ctr">
-            <a:spAutoFit/>
-          </a:bodyPr>
-          <a:lstStyle/>
-          <a:p>
-            <a:pPr algn="l">
-              <a:lnSpc>
-                <a:spcPct val="100000"/>
-              </a:lnSpc>
-              <a:spcAft>
-                <a:spcPts val="0"/>
-              </a:spcAft>
-            </a:pPr>
-            <a:r>
-              <a:rPr sz="800" b="0" i="0">
-                <a:solidFill>
-                  <a:srgbClr val="595959"/>
-                </a:solidFill>
-                <a:latin typeface="맑은 고딕"/>
-                <a:ea typeface="맑은 고딕"/>
-                <a:cs typeface="맑은 고딕"/>
-              </a:rPr>
-              <a:t>새 입력 크기</a:t>
-            </a:r>
-          </a:p>
-        </p:txBody>
-      </p:sp>
-      <p:sp>
-        <p:nvSpPr>
-          <p:cNvPr id="9068" name="TextBox 9067"/>
-          <p:cNvSpPr txBox="1"/>
-          <p:nvPr/>
-        </p:nvSpPr>
-        <p:spPr>
-          <a:xfrm>
-            <a:off x="1664207" y="3291839"/>
-            <a:ext cx="1947672" cy="173736"/>
-          </a:xfrm>
-          <a:prstGeom prst="rect">
-            <a:avLst/>
-          </a:prstGeom>
-          <a:noFill/>
-        </p:spPr>
-        <p:txBody>
-          <a:bodyPr wrap="square" lIns="0" rIns="0" tIns="0" bIns="0" anchor="ctr">
-            <a:spAutoFit/>
-          </a:bodyPr>
-          <a:lstStyle/>
-          <a:p>
-            <a:pPr algn="l">
-              <a:lnSpc>
-                <a:spcPct val="100000"/>
-              </a:lnSpc>
-              <a:spcAft>
-                <a:spcPts val="0"/>
-              </a:spcAft>
-            </a:pPr>
-            <a:r>
-              <a:rPr sz="800" b="1" i="0">
-                <a:solidFill>
-                  <a:srgbClr val="595959"/>
-                </a:solidFill>
-                <a:latin typeface="맑은 고딕"/>
-                <a:ea typeface="맑은 고딕"/>
-                <a:cs typeface="맑은 고딕"/>
-              </a:rPr>
-              <a:t>2,000 토큰 (전체)</a:t>
-            </a:r>
-          </a:p>
-        </p:txBody>
-      </p:sp>
-      <p:sp>
-        <p:nvSpPr>
-          <p:cNvPr id="9069" name="TextBox 9068"/>
-          <p:cNvSpPr txBox="1"/>
-          <p:nvPr/>
-        </p:nvSpPr>
-        <p:spPr>
-          <a:xfrm>
-            <a:off x="603504" y="3474720"/>
-            <a:ext cx="1024128" cy="173736"/>
-          </a:xfrm>
-          <a:prstGeom prst="rect">
-            <a:avLst/>
-          </a:prstGeom>
-          <a:noFill/>
-        </p:spPr>
-        <p:txBody>
-          <a:bodyPr wrap="square" lIns="0" rIns="0" tIns="0" bIns="0" anchor="ctr">
-            <a:spAutoFit/>
-          </a:bodyPr>
-          <a:lstStyle/>
-          <a:p>
-            <a:pPr algn="l">
-              <a:lnSpc>
-                <a:spcPct val="100000"/>
-              </a:lnSpc>
-              <a:spcAft>
-                <a:spcPts val="0"/>
-              </a:spcAft>
-            </a:pPr>
-            <a:r>
-              <a:rPr sz="800" b="0" i="0">
-                <a:solidFill>
-                  <a:srgbClr val="595959"/>
-                </a:solidFill>
-                <a:latin typeface="맑은 고딕"/>
-                <a:ea typeface="맑은 고딕"/>
-                <a:cs typeface="맑은 고딕"/>
-              </a:rPr>
-              <a:t>누적 KV 캐시</a:t>
-            </a:r>
-          </a:p>
-        </p:txBody>
-      </p:sp>
-      <p:sp>
-        <p:nvSpPr>
-          <p:cNvPr id="9070" name="TextBox 9069"/>
-          <p:cNvSpPr txBox="1"/>
-          <p:nvPr/>
-        </p:nvSpPr>
-        <p:spPr>
-          <a:xfrm>
-            <a:off x="1664207" y="3474720"/>
-            <a:ext cx="1947672" cy="173736"/>
-          </a:xfrm>
-          <a:prstGeom prst="rect">
-            <a:avLst/>
-          </a:prstGeom>
-          <a:noFill/>
-        </p:spPr>
-        <p:txBody>
-          <a:bodyPr wrap="square" lIns="0" rIns="0" tIns="0" bIns="0" anchor="ctr">
-            <a:spAutoFit/>
-          </a:bodyPr>
-          <a:lstStyle/>
-          <a:p>
-            <a:pPr algn="l">
-              <a:lnSpc>
-                <a:spcPct val="100000"/>
-              </a:lnSpc>
-              <a:spcAft>
-                <a:spcPts val="0"/>
-              </a:spcAft>
-            </a:pPr>
-            <a:r>
-              <a:rPr sz="800" b="1" i="0">
-                <a:solidFill>
-                  <a:srgbClr val="595959"/>
-                </a:solidFill>
-                <a:latin typeface="맑은 고딕"/>
-                <a:ea typeface="맑은 고딕"/>
-                <a:cs typeface="맑은 고딕"/>
-              </a:rPr>
-              <a:t>없음</a:t>
-            </a:r>
-          </a:p>
-        </p:txBody>
-      </p:sp>
-      <p:sp>
-        <p:nvSpPr>
-          <p:cNvPr id="9071" name="TextBox 9070"/>
-          <p:cNvSpPr txBox="1"/>
-          <p:nvPr/>
-        </p:nvSpPr>
-        <p:spPr>
-          <a:xfrm>
-            <a:off x="603504" y="3657600"/>
-            <a:ext cx="1024128" cy="173736"/>
-          </a:xfrm>
-          <a:prstGeom prst="rect">
-            <a:avLst/>
-          </a:prstGeom>
-          <a:noFill/>
-        </p:spPr>
-        <p:txBody>
-          <a:bodyPr wrap="square" lIns="0" rIns="0" tIns="0" bIns="0" anchor="ctr">
-            <a:spAutoFit/>
-          </a:bodyPr>
-          <a:lstStyle/>
-          <a:p>
-            <a:pPr algn="l">
-              <a:lnSpc>
-                <a:spcPct val="100000"/>
-              </a:lnSpc>
-              <a:spcAft>
-                <a:spcPts val="0"/>
-              </a:spcAft>
-            </a:pPr>
-            <a:r>
-              <a:rPr sz="800" b="0" i="0">
-                <a:solidFill>
-                  <a:srgbClr val="595959"/>
-                </a:solidFill>
-                <a:latin typeface="맑은 고딕"/>
-                <a:ea typeface="맑은 고딕"/>
-                <a:cs typeface="맑은 고딕"/>
-              </a:rPr>
-              <a:t>P 노드 부하</a:t>
-            </a:r>
-          </a:p>
-        </p:txBody>
-      </p:sp>
-      <p:sp>
-        <p:nvSpPr>
-          <p:cNvPr id="9072" name="TextBox 9071"/>
-          <p:cNvSpPr txBox="1"/>
-          <p:nvPr/>
-        </p:nvSpPr>
-        <p:spPr>
-          <a:xfrm>
-            <a:off x="1664207" y="3657600"/>
-            <a:ext cx="1947672" cy="173736"/>
-          </a:xfrm>
-          <a:prstGeom prst="rect">
-            <a:avLst/>
-          </a:prstGeom>
-          <a:noFill/>
-        </p:spPr>
-        <p:txBody>
-          <a:bodyPr wrap="square" lIns="0" rIns="0" tIns="0" bIns="0" anchor="ctr">
-            <a:spAutoFit/>
-          </a:bodyPr>
-          <a:lstStyle/>
-          <a:p>
-            <a:pPr algn="l">
-              <a:lnSpc>
-                <a:spcPct val="100000"/>
-              </a:lnSpc>
-              <a:spcAft>
-                <a:spcPts val="0"/>
-              </a:spcAft>
-            </a:pPr>
-            <a:r>
-              <a:rPr sz="800" b="1" i="0">
-                <a:solidFill>
-                  <a:srgbClr val="548235"/>
-                </a:solidFill>
-                <a:latin typeface="맑은 고딕"/>
-                <a:ea typeface="맑은 고딕"/>
-                <a:cs typeface="맑은 고딕"/>
-              </a:rPr>
-              <a:t>낮음</a:t>
-            </a:r>
-          </a:p>
-        </p:txBody>
-      </p:sp>
-      <p:sp>
-        <p:nvSpPr>
-          <p:cNvPr id="9073" name="TextBox 9072"/>
-          <p:cNvSpPr txBox="1"/>
-          <p:nvPr/>
-        </p:nvSpPr>
-        <p:spPr>
-          <a:xfrm>
-            <a:off x="603504" y="3840480"/>
-            <a:ext cx="1024128" cy="173736"/>
-          </a:xfrm>
-          <a:prstGeom prst="rect">
-            <a:avLst/>
-          </a:prstGeom>
-          <a:noFill/>
-        </p:spPr>
-        <p:txBody>
-          <a:bodyPr wrap="square" lIns="0" rIns="0" tIns="0" bIns="0" anchor="ctr">
-            <a:spAutoFit/>
-          </a:bodyPr>
-          <a:lstStyle/>
-          <a:p>
-            <a:pPr algn="l">
-              <a:lnSpc>
-                <a:spcPct val="100000"/>
-              </a:lnSpc>
-              <a:spcAft>
-                <a:spcPts val="0"/>
-              </a:spcAft>
-            </a:pPr>
-            <a:r>
-              <a:rPr sz="800" b="0" i="0">
-                <a:solidFill>
-                  <a:srgbClr val="595959"/>
-                </a:solidFill>
-                <a:latin typeface="맑은 고딕"/>
-                <a:ea typeface="맑은 고딕"/>
-                <a:cs typeface="맑은 고딕"/>
-              </a:rPr>
-              <a:t>D 노드 부하</a:t>
-            </a:r>
-          </a:p>
-        </p:txBody>
-      </p:sp>
-      <p:sp>
-        <p:nvSpPr>
-          <p:cNvPr id="9074" name="TextBox 9073"/>
-          <p:cNvSpPr txBox="1"/>
-          <p:nvPr/>
-        </p:nvSpPr>
-        <p:spPr>
-          <a:xfrm>
-            <a:off x="1664207" y="3840480"/>
-            <a:ext cx="1947672" cy="173736"/>
-          </a:xfrm>
-          <a:prstGeom prst="rect">
-            <a:avLst/>
-          </a:prstGeom>
-          <a:noFill/>
-        </p:spPr>
-        <p:txBody>
-          <a:bodyPr wrap="square" lIns="0" rIns="0" tIns="0" bIns="0" anchor="ctr">
-            <a:spAutoFit/>
-          </a:bodyPr>
-          <a:lstStyle/>
-          <a:p>
-            <a:pPr algn="l">
-              <a:lnSpc>
-                <a:spcPct val="100000"/>
-              </a:lnSpc>
-              <a:spcAft>
-                <a:spcPts val="0"/>
-              </a:spcAft>
-            </a:pPr>
-            <a:r>
-              <a:rPr sz="800" b="1" i="0">
-                <a:solidFill>
-                  <a:srgbClr val="548235"/>
-                </a:solidFill>
-                <a:latin typeface="맑은 고딕"/>
-                <a:ea typeface="맑은 고딕"/>
-                <a:cs typeface="맑은 고딕"/>
-              </a:rPr>
-              <a:t>낮음</a:t>
-            </a:r>
-          </a:p>
-        </p:txBody>
-      </p:sp>
-      <p:sp>
-        <p:nvSpPr>
-          <p:cNvPr id="9075" name="Rounded Rectangle 9074"/>
-          <p:cNvSpPr/>
-          <p:nvPr/>
-        </p:nvSpPr>
-        <p:spPr>
-          <a:xfrm>
-            <a:off x="493776" y="4151376"/>
-            <a:ext cx="3227832" cy="384048"/>
-          </a:xfrm>
-          <a:prstGeom prst="roundRect">
-            <a:avLst>
-              <a:gd name="adj" fmla="val 10000"/>
+              <a:gd name="adj" fmla="val 8000"/>
             </a:avLst>
           </a:prstGeom>
           <a:solidFill>
@@ -7594,11 +6941,11 @@
                 <a:spcPct val="100000"/>
               </a:lnSpc>
               <a:spcAft>
-                <a:spcPts val="0"/>
+                <a:spcPts val="100"/>
               </a:spcAft>
             </a:pPr>
             <a:r>
-              <a:rPr sz="1000" b="1" i="0">
+              <a:rPr sz="950" b="1" i="0">
                 <a:solidFill>
                   <a:srgbClr val="C55A11"/>
                 </a:solidFill>
@@ -7606,54 +6953,20 @@
                 <a:ea typeface="맑은 고딕"/>
                 <a:cs typeface="맑은 고딕"/>
               </a:rPr>
-              <a:t>→ </a:t>
-            </a:r>
-            <a:r>
-              <a:rPr sz="1050" b="1" i="0">
-                <a:solidFill>
-                  <a:srgbClr val="C55A11"/>
-                </a:solidFill>
-                <a:latin typeface="맑은 고딕"/>
-                <a:ea typeface="맑은 고딕"/>
-                <a:cs typeface="맑은 고딕"/>
-              </a:rPr>
-              <a:t>P 노드에서 Prefill</a:t>
-            </a:r>
-          </a:p>
-        </p:txBody>
-      </p:sp>
-      <p:sp>
-        <p:nvSpPr>
-          <p:cNvPr id="9076" name="TextBox 9075"/>
-          <p:cNvSpPr txBox="1"/>
-          <p:nvPr/>
-        </p:nvSpPr>
-        <p:spPr>
-          <a:xfrm>
-            <a:off x="493776" y="4608576"/>
-            <a:ext cx="3227832" cy="402336"/>
-          </a:xfrm>
-          <a:prstGeom prst="rect">
-            <a:avLst/>
-          </a:prstGeom>
-          <a:noFill/>
-        </p:spPr>
-        <p:txBody>
-          <a:bodyPr wrap="square" lIns="0" rIns="0" tIns="0" bIns="0" anchor="t">
-            <a:spAutoFit/>
-          </a:bodyPr>
-          <a:lstStyle/>
-          <a:p>
-            <a:pPr algn="l">
-              <a:lnSpc>
-                <a:spcPct val="120000"/>
+              <a:t>P 노드</a:t>
+            </a:r>
+          </a:p>
+          <a:p>
+            <a:pPr algn="ctr">
+              <a:lnSpc>
+                <a:spcPct val="100000"/>
               </a:lnSpc>
               <a:spcAft>
                 <a:spcPts val="0"/>
               </a:spcAft>
             </a:pPr>
             <a:r>
-              <a:rPr sz="800" b="0" i="0">
+              <a:rPr sz="700" b="0" i="0">
                 <a:solidFill>
                   <a:srgbClr val="595959"/>
                 </a:solidFill>
@@ -7661,789 +6974,25 @@
                 <a:ea typeface="맑은 고딕"/>
                 <a:cs typeface="맑은 고딕"/>
               </a:rPr>
-              <a:t>이전 대화가 없어 옮길 KV 캐시가 없음 → 기본 경로대로 P에서 처리</a:t>
-            </a:r>
-          </a:p>
-        </p:txBody>
-      </p:sp>
-      <p:sp>
-        <p:nvSpPr>
-          <p:cNvPr id="9077" name="Right Arrow 9076"/>
+              <a:t>Prefill 전용</a:t>
+            </a:r>
+          </a:p>
+        </p:txBody>
+      </p:sp>
+      <p:sp>
+        <p:nvSpPr>
+          <p:cNvPr id="9063" name="Rounded Rectangle 9062"/>
           <p:cNvSpPr/>
           <p:nvPr/>
         </p:nvSpPr>
         <p:spPr>
           <a:xfrm>
-            <a:off x="3959352" y="3401568"/>
-            <a:ext cx="274320" cy="182880"/>
-          </a:xfrm>
-          <a:prstGeom prst="rightArrow">
-            <a:avLst/>
-          </a:prstGeom>
-          <a:solidFill>
-            <a:srgbClr val="808080"/>
-          </a:solidFill>
-          <a:ln>
-            <a:noFill/>
-          </a:ln>
-          <a:effectLst/>
-        </p:spPr>
-        <p:style>
-          <a:lnRef idx="1">
-            <a:schemeClr val="accent1"/>
-          </a:lnRef>
-          <a:fillRef idx="3">
-            <a:schemeClr val="accent1"/>
-          </a:fillRef>
-          <a:effectRef idx="2">
-            <a:schemeClr val="accent1"/>
-          </a:effectRef>
-          <a:fontRef idx="minor">
-            <a:schemeClr val="lt1"/>
-          </a:fontRef>
-        </p:style>
-        <p:txBody>
-          <a:bodyPr rtlCol="0" anchor="ctr" wrap="square" lIns="54864" rIns="54864" tIns="0" bIns="0"/>
-          <a:lstStyle/>
-          <a:p>
-            <a:pPr algn="l">
-              <a:lnSpc>
-                <a:spcPct val="100000"/>
-              </a:lnSpc>
-              <a:spcAft>
-                <a:spcPts val="0"/>
-              </a:spcAft>
-            </a:pPr>
-            <a:r>
-              <a:rPr sz="100" b="0" i="0">
-                <a:solidFill>
-                  <a:srgbClr val="000000"/>
-                </a:solidFill>
-                <a:latin typeface="맑은 고딕"/>
-                <a:ea typeface="맑은 고딕"/>
-                <a:cs typeface="맑은 고딕"/>
-              </a:rPr>
-              <a:t/>
-            </a:r>
-          </a:p>
-        </p:txBody>
-      </p:sp>
-      <p:sp>
-        <p:nvSpPr>
-          <p:cNvPr id="9078" name="TextBox 9077"/>
-          <p:cNvSpPr txBox="1"/>
-          <p:nvPr/>
-        </p:nvSpPr>
-        <p:spPr>
-          <a:xfrm>
-            <a:off x="3822192" y="3621024"/>
-            <a:ext cx="548640" cy="182880"/>
-          </a:xfrm>
-          <a:prstGeom prst="rect">
-            <a:avLst/>
-          </a:prstGeom>
-          <a:noFill/>
-        </p:spPr>
-        <p:txBody>
-          <a:bodyPr wrap="square" lIns="0" rIns="0" tIns="0" bIns="0" anchor="t">
-            <a:spAutoFit/>
-          </a:bodyPr>
-          <a:lstStyle/>
-          <a:p>
-            <a:pPr algn="ctr">
-              <a:lnSpc>
-                <a:spcPct val="100000"/>
-              </a:lnSpc>
-              <a:spcAft>
-                <a:spcPts val="0"/>
-              </a:spcAft>
-            </a:pPr>
-            <a:r>
-              <a:rPr sz="700" b="0" i="0">
-                <a:solidFill>
-                  <a:srgbClr val="808080"/>
-                </a:solidFill>
-                <a:latin typeface="맑은 고딕"/>
-                <a:ea typeface="맑은 고딕"/>
-                <a:cs typeface="맑은 고딕"/>
-              </a:rPr>
-              <a:t>Tool 호출</a:t>
-            </a:r>
-          </a:p>
-        </p:txBody>
-      </p:sp>
-      <p:sp>
-        <p:nvSpPr>
-          <p:cNvPr id="9079" name="Rounded Rectangle 9078"/>
-          <p:cNvSpPr/>
-          <p:nvPr/>
-        </p:nvSpPr>
-        <p:spPr>
-          <a:xfrm>
-            <a:off x="4325112" y="2286000"/>
-            <a:ext cx="3520440" cy="2788920"/>
+            <a:off x="347472" y="3895344"/>
+            <a:ext cx="804672" cy="1024128"/>
           </a:xfrm>
           <a:prstGeom prst="roundRect">
             <a:avLst>
-              <a:gd name="adj" fmla="val 3500"/>
-            </a:avLst>
-          </a:prstGeom>
-          <a:solidFill>
-            <a:srgbClr val="FFFFFF"/>
-          </a:solidFill>
-          <a:ln w="12700">
-            <a:solidFill>
-              <a:srgbClr val="D9D9D9"/>
-            </a:solidFill>
-          </a:ln>
-          <a:effectLst/>
-        </p:spPr>
-        <p:style>
-          <a:lnRef idx="1">
-            <a:schemeClr val="accent1"/>
-          </a:lnRef>
-          <a:fillRef idx="3">
-            <a:schemeClr val="accent1"/>
-          </a:fillRef>
-          <a:effectRef idx="2">
-            <a:schemeClr val="accent1"/>
-          </a:effectRef>
-          <a:fontRef idx="minor">
-            <a:schemeClr val="lt1"/>
-          </a:fontRef>
-        </p:style>
-        <p:txBody>
-          <a:bodyPr rtlCol="0" anchor="ctr" wrap="square" lIns="54864" rIns="54864" tIns="0" bIns="0"/>
-          <a:lstStyle/>
-          <a:p>
-            <a:pPr algn="l">
-              <a:lnSpc>
-                <a:spcPct val="100000"/>
-              </a:lnSpc>
-              <a:spcAft>
-                <a:spcPts val="0"/>
-              </a:spcAft>
-            </a:pPr>
-            <a:r>
-              <a:rPr sz="100" b="0" i="0">
-                <a:solidFill>
-                  <a:srgbClr val="000000"/>
-                </a:solidFill>
-                <a:latin typeface="맑은 고딕"/>
-                <a:ea typeface="맑은 고딕"/>
-                <a:cs typeface="맑은 고딕"/>
-              </a:rPr>
-              <a:t/>
-            </a:r>
-          </a:p>
-        </p:txBody>
-      </p:sp>
-      <p:sp>
-        <p:nvSpPr>
-          <p:cNvPr id="9080" name="Rounded Rectangle 9079"/>
-          <p:cNvSpPr/>
-          <p:nvPr/>
-        </p:nvSpPr>
-        <p:spPr>
-          <a:xfrm>
-            <a:off x="4325112" y="2286000"/>
-            <a:ext cx="3520440" cy="310896"/>
-          </a:xfrm>
-          <a:prstGeom prst="roundRect">
-            <a:avLst>
-              <a:gd name="adj" fmla="val 10000"/>
-            </a:avLst>
-          </a:prstGeom>
-          <a:solidFill>
-            <a:srgbClr val="1F3864"/>
-          </a:solidFill>
-          <a:ln>
-            <a:noFill/>
-          </a:ln>
-          <a:effectLst/>
-        </p:spPr>
-        <p:style>
-          <a:lnRef idx="1">
-            <a:schemeClr val="accent1"/>
-          </a:lnRef>
-          <a:fillRef idx="3">
-            <a:schemeClr val="accent1"/>
-          </a:fillRef>
-          <a:effectRef idx="2">
-            <a:schemeClr val="accent1"/>
-          </a:effectRef>
-          <a:fontRef idx="minor">
-            <a:schemeClr val="lt1"/>
-          </a:fontRef>
-        </p:style>
-        <p:txBody>
-          <a:bodyPr rtlCol="0" anchor="ctr" wrap="square" lIns="54864" rIns="54864" tIns="0" bIns="0"/>
-          <a:lstStyle/>
-          <a:p>
-            <a:pPr algn="ctr">
-              <a:lnSpc>
-                <a:spcPct val="100000"/>
-              </a:lnSpc>
-              <a:spcAft>
-                <a:spcPts val="0"/>
-              </a:spcAft>
-            </a:pPr>
-            <a:r>
-              <a:rPr sz="1050" b="1" i="0">
-                <a:solidFill>
-                  <a:srgbClr val="FFFFFF"/>
-                </a:solidFill>
-                <a:latin typeface="맑은 고딕"/>
-                <a:ea typeface="맑은 고딕"/>
-                <a:cs typeface="맑은 고딕"/>
-              </a:rPr>
-              <a:t>Turn 2</a:t>
-            </a:r>
-            <a:r>
-              <a:rPr sz="900" b="0" i="0">
-                <a:solidFill>
-                  <a:srgbClr val="FFFFFF"/>
-                </a:solidFill>
-                <a:latin typeface="맑은 고딕"/>
-                <a:ea typeface="맑은 고딕"/>
-                <a:cs typeface="맑은 고딕"/>
-              </a:rPr>
-              <a:t>   ·   Tool 결과가 돌아옴</a:t>
-            </a:r>
-          </a:p>
-        </p:txBody>
-      </p:sp>
-      <p:sp>
-        <p:nvSpPr>
-          <p:cNvPr id="9081" name="TextBox 9080"/>
-          <p:cNvSpPr txBox="1"/>
-          <p:nvPr/>
-        </p:nvSpPr>
-        <p:spPr>
-          <a:xfrm>
-            <a:off x="4471416" y="2670048"/>
-            <a:ext cx="3227832" cy="292608"/>
-          </a:xfrm>
-          <a:prstGeom prst="rect">
-            <a:avLst/>
-          </a:prstGeom>
-          <a:noFill/>
-        </p:spPr>
-        <p:txBody>
-          <a:bodyPr wrap="square" lIns="0" rIns="0" tIns="0" bIns="0" anchor="t">
-            <a:spAutoFit/>
-          </a:bodyPr>
-          <a:lstStyle/>
-          <a:p>
-            <a:pPr algn="l">
-              <a:lnSpc>
-                <a:spcPct val="115000"/>
-              </a:lnSpc>
-              <a:spcAft>
-                <a:spcPts val="0"/>
-              </a:spcAft>
-            </a:pPr>
-            <a:r>
-              <a:rPr sz="800" b="1" i="0">
-                <a:solidFill>
-                  <a:srgbClr val="808080"/>
-                </a:solidFill>
-                <a:latin typeface="맑은 고딕"/>
-                <a:ea typeface="맑은 고딕"/>
-                <a:cs typeface="맑은 고딕"/>
-              </a:rPr>
-              <a:t>입력 :  </a:t>
-            </a:r>
-            <a:r>
-              <a:rPr sz="800" b="0" i="0">
-                <a:solidFill>
-                  <a:srgbClr val="595959"/>
-                </a:solidFill>
-                <a:latin typeface="맑은 고딕"/>
-                <a:ea typeface="맑은 고딕"/>
-                <a:cs typeface="맑은 고딕"/>
-              </a:rPr>
-              <a:t>Tool 결과 100 토큰  (새로 추가된 부분만 Prefill)</a:t>
-            </a:r>
-          </a:p>
-        </p:txBody>
-      </p:sp>
-      <p:sp>
-        <p:nvSpPr>
-          <p:cNvPr id="9082" name="Rounded Rectangle 9081"/>
-          <p:cNvSpPr/>
-          <p:nvPr/>
-        </p:nvSpPr>
-        <p:spPr>
-          <a:xfrm>
-            <a:off x="4471416" y="3035808"/>
-            <a:ext cx="3227832" cy="1005840"/>
-          </a:xfrm>
-          <a:prstGeom prst="roundRect">
-            <a:avLst>
-              <a:gd name="adj" fmla="val 6000"/>
-            </a:avLst>
-          </a:prstGeom>
-          <a:solidFill>
-            <a:srgbClr val="F7F9FC"/>
-          </a:solidFill>
-          <a:ln w="9525">
-            <a:solidFill>
-              <a:srgbClr val="D9D9D9"/>
-            </a:solidFill>
-          </a:ln>
-          <a:effectLst/>
-        </p:spPr>
-        <p:style>
-          <a:lnRef idx="1">
-            <a:schemeClr val="accent1"/>
-          </a:lnRef>
-          <a:fillRef idx="3">
-            <a:schemeClr val="accent1"/>
-          </a:fillRef>
-          <a:effectRef idx="2">
-            <a:schemeClr val="accent1"/>
-          </a:effectRef>
-          <a:fontRef idx="minor">
-            <a:schemeClr val="lt1"/>
-          </a:fontRef>
-        </p:style>
-        <p:txBody>
-          <a:bodyPr rtlCol="0" anchor="ctr" wrap="square" lIns="54864" rIns="54864" tIns="0" bIns="0"/>
-          <a:lstStyle/>
-          <a:p>
-            <a:pPr algn="l">
-              <a:lnSpc>
-                <a:spcPct val="100000"/>
-              </a:lnSpc>
-              <a:spcAft>
-                <a:spcPts val="0"/>
-              </a:spcAft>
-            </a:pPr>
-            <a:r>
-              <a:rPr sz="100" b="0" i="0">
-                <a:solidFill>
-                  <a:srgbClr val="000000"/>
-                </a:solidFill>
-                <a:latin typeface="맑은 고딕"/>
-                <a:ea typeface="맑은 고딕"/>
-                <a:cs typeface="맑은 고딕"/>
-              </a:rPr>
-              <a:t/>
-            </a:r>
-          </a:p>
-        </p:txBody>
-      </p:sp>
-      <p:sp>
-        <p:nvSpPr>
-          <p:cNvPr id="9083" name="TextBox 9082"/>
-          <p:cNvSpPr txBox="1"/>
-          <p:nvPr/>
-        </p:nvSpPr>
-        <p:spPr>
-          <a:xfrm>
-            <a:off x="4581144" y="3099815"/>
-            <a:ext cx="3008376" cy="164592"/>
-          </a:xfrm>
-          <a:prstGeom prst="rect">
-            <a:avLst/>
-          </a:prstGeom>
-          <a:noFill/>
-        </p:spPr>
-        <p:txBody>
-          <a:bodyPr wrap="square" lIns="0" rIns="0" tIns="0" bIns="0" anchor="t">
-            <a:spAutoFit/>
-          </a:bodyPr>
-          <a:lstStyle/>
-          <a:p>
-            <a:pPr algn="l">
-              <a:lnSpc>
-                <a:spcPct val="100000"/>
-              </a:lnSpc>
-              <a:spcAft>
-                <a:spcPts val="0"/>
-              </a:spcAft>
-            </a:pPr>
-            <a:r>
-              <a:rPr sz="750" b="1" i="0">
-                <a:solidFill>
-                  <a:srgbClr val="808080"/>
-                </a:solidFill>
-                <a:latin typeface="맑은 고딕"/>
-                <a:ea typeface="맑은 고딕"/>
-                <a:cs typeface="맑은 고딕"/>
-              </a:rPr>
-              <a:t>이 시점의 상태</a:t>
-            </a:r>
-          </a:p>
-        </p:txBody>
-      </p:sp>
-      <p:sp>
-        <p:nvSpPr>
-          <p:cNvPr id="9084" name="TextBox 9083"/>
-          <p:cNvSpPr txBox="1"/>
-          <p:nvPr/>
-        </p:nvSpPr>
-        <p:spPr>
-          <a:xfrm>
-            <a:off x="4581144" y="3291839"/>
-            <a:ext cx="1024128" cy="173736"/>
-          </a:xfrm>
-          <a:prstGeom prst="rect">
-            <a:avLst/>
-          </a:prstGeom>
-          <a:noFill/>
-        </p:spPr>
-        <p:txBody>
-          <a:bodyPr wrap="square" lIns="0" rIns="0" tIns="0" bIns="0" anchor="ctr">
-            <a:spAutoFit/>
-          </a:bodyPr>
-          <a:lstStyle/>
-          <a:p>
-            <a:pPr algn="l">
-              <a:lnSpc>
-                <a:spcPct val="100000"/>
-              </a:lnSpc>
-              <a:spcAft>
-                <a:spcPts val="0"/>
-              </a:spcAft>
-            </a:pPr>
-            <a:r>
-              <a:rPr sz="800" b="0" i="0">
-                <a:solidFill>
-                  <a:srgbClr val="595959"/>
-                </a:solidFill>
-                <a:latin typeface="맑은 고딕"/>
-                <a:ea typeface="맑은 고딕"/>
-                <a:cs typeface="맑은 고딕"/>
-              </a:rPr>
-              <a:t>새 입력 크기</a:t>
-            </a:r>
-          </a:p>
-        </p:txBody>
-      </p:sp>
-      <p:sp>
-        <p:nvSpPr>
-          <p:cNvPr id="9085" name="TextBox 9084"/>
-          <p:cNvSpPr txBox="1"/>
-          <p:nvPr/>
-        </p:nvSpPr>
-        <p:spPr>
-          <a:xfrm>
-            <a:off x="5641848" y="3291839"/>
-            <a:ext cx="1947672" cy="173736"/>
-          </a:xfrm>
-          <a:prstGeom prst="rect">
-            <a:avLst/>
-          </a:prstGeom>
-          <a:noFill/>
-        </p:spPr>
-        <p:txBody>
-          <a:bodyPr wrap="square" lIns="0" rIns="0" tIns="0" bIns="0" anchor="ctr">
-            <a:spAutoFit/>
-          </a:bodyPr>
-          <a:lstStyle/>
-          <a:p>
-            <a:pPr algn="l">
-              <a:lnSpc>
-                <a:spcPct val="100000"/>
-              </a:lnSpc>
-              <a:spcAft>
-                <a:spcPts val="0"/>
-              </a:spcAft>
-            </a:pPr>
-            <a:r>
-              <a:rPr sz="800" b="1" i="0">
-                <a:solidFill>
-                  <a:srgbClr val="548235"/>
-                </a:solidFill>
-                <a:latin typeface="맑은 고딕"/>
-                <a:ea typeface="맑은 고딕"/>
-                <a:cs typeface="맑은 고딕"/>
-              </a:rPr>
-              <a:t>100 토큰 (작음)</a:t>
-            </a:r>
-          </a:p>
-        </p:txBody>
-      </p:sp>
-      <p:sp>
-        <p:nvSpPr>
-          <p:cNvPr id="9086" name="TextBox 9085"/>
-          <p:cNvSpPr txBox="1"/>
-          <p:nvPr/>
-        </p:nvSpPr>
-        <p:spPr>
-          <a:xfrm>
-            <a:off x="4581144" y="3474720"/>
-            <a:ext cx="1024128" cy="173736"/>
-          </a:xfrm>
-          <a:prstGeom prst="rect">
-            <a:avLst/>
-          </a:prstGeom>
-          <a:noFill/>
-        </p:spPr>
-        <p:txBody>
-          <a:bodyPr wrap="square" lIns="0" rIns="0" tIns="0" bIns="0" anchor="ctr">
-            <a:spAutoFit/>
-          </a:bodyPr>
-          <a:lstStyle/>
-          <a:p>
-            <a:pPr algn="l">
-              <a:lnSpc>
-                <a:spcPct val="100000"/>
-              </a:lnSpc>
-              <a:spcAft>
-                <a:spcPts val="0"/>
-              </a:spcAft>
-            </a:pPr>
-            <a:r>
-              <a:rPr sz="800" b="0" i="0">
-                <a:solidFill>
-                  <a:srgbClr val="595959"/>
-                </a:solidFill>
-                <a:latin typeface="맑은 고딕"/>
-                <a:ea typeface="맑은 고딕"/>
-                <a:cs typeface="맑은 고딕"/>
-              </a:rPr>
-              <a:t>누적 KV 캐시</a:t>
-            </a:r>
-          </a:p>
-        </p:txBody>
-      </p:sp>
-      <p:sp>
-        <p:nvSpPr>
-          <p:cNvPr id="9087" name="TextBox 9086"/>
-          <p:cNvSpPr txBox="1"/>
-          <p:nvPr/>
-        </p:nvSpPr>
-        <p:spPr>
-          <a:xfrm>
-            <a:off x="5641848" y="3474720"/>
-            <a:ext cx="1947672" cy="173736"/>
-          </a:xfrm>
-          <a:prstGeom prst="rect">
-            <a:avLst/>
-          </a:prstGeom>
-          <a:noFill/>
-        </p:spPr>
-        <p:txBody>
-          <a:bodyPr wrap="square" lIns="0" rIns="0" tIns="0" bIns="0" anchor="ctr">
-            <a:spAutoFit/>
-          </a:bodyPr>
-          <a:lstStyle/>
-          <a:p>
-            <a:pPr algn="l">
-              <a:lnSpc>
-                <a:spcPct val="100000"/>
-              </a:lnSpc>
-              <a:spcAft>
-                <a:spcPts val="0"/>
-              </a:spcAft>
-            </a:pPr>
-            <a:r>
-              <a:rPr sz="800" b="1" i="0">
-                <a:solidFill>
-                  <a:srgbClr val="595959"/>
-                </a:solidFill>
-                <a:latin typeface="맑은 고딕"/>
-                <a:ea typeface="맑은 고딕"/>
-                <a:cs typeface="맑은 고딕"/>
-              </a:rPr>
-              <a:t>중간 · D 노드에 있음</a:t>
-            </a:r>
-          </a:p>
-        </p:txBody>
-      </p:sp>
-      <p:sp>
-        <p:nvSpPr>
-          <p:cNvPr id="9088" name="TextBox 9087"/>
-          <p:cNvSpPr txBox="1"/>
-          <p:nvPr/>
-        </p:nvSpPr>
-        <p:spPr>
-          <a:xfrm>
-            <a:off x="4581144" y="3657600"/>
-            <a:ext cx="1024128" cy="173736"/>
-          </a:xfrm>
-          <a:prstGeom prst="rect">
-            <a:avLst/>
-          </a:prstGeom>
-          <a:noFill/>
-        </p:spPr>
-        <p:txBody>
-          <a:bodyPr wrap="square" lIns="0" rIns="0" tIns="0" bIns="0" anchor="ctr">
-            <a:spAutoFit/>
-          </a:bodyPr>
-          <a:lstStyle/>
-          <a:p>
-            <a:pPr algn="l">
-              <a:lnSpc>
-                <a:spcPct val="100000"/>
-              </a:lnSpc>
-              <a:spcAft>
-                <a:spcPts val="0"/>
-              </a:spcAft>
-            </a:pPr>
-            <a:r>
-              <a:rPr sz="800" b="0" i="0">
-                <a:solidFill>
-                  <a:srgbClr val="595959"/>
-                </a:solidFill>
-                <a:latin typeface="맑은 고딕"/>
-                <a:ea typeface="맑은 고딕"/>
-                <a:cs typeface="맑은 고딕"/>
-              </a:rPr>
-              <a:t>P 노드 부하</a:t>
-            </a:r>
-          </a:p>
-        </p:txBody>
-      </p:sp>
-      <p:sp>
-        <p:nvSpPr>
-          <p:cNvPr id="9089" name="TextBox 9088"/>
-          <p:cNvSpPr txBox="1"/>
-          <p:nvPr/>
-        </p:nvSpPr>
-        <p:spPr>
-          <a:xfrm>
-            <a:off x="5641848" y="3657600"/>
-            <a:ext cx="1947672" cy="173736"/>
-          </a:xfrm>
-          <a:prstGeom prst="rect">
-            <a:avLst/>
-          </a:prstGeom>
-          <a:noFill/>
-        </p:spPr>
-        <p:txBody>
-          <a:bodyPr wrap="square" lIns="0" rIns="0" tIns="0" bIns="0" anchor="ctr">
-            <a:spAutoFit/>
-          </a:bodyPr>
-          <a:lstStyle/>
-          <a:p>
-            <a:pPr algn="l">
-              <a:lnSpc>
-                <a:spcPct val="100000"/>
-              </a:lnSpc>
-              <a:spcAft>
-                <a:spcPts val="0"/>
-              </a:spcAft>
-            </a:pPr>
-            <a:r>
-              <a:rPr sz="800" b="1" i="0">
-                <a:solidFill>
-                  <a:srgbClr val="C00000"/>
-                </a:solidFill>
-                <a:latin typeface="맑은 고딕"/>
-                <a:ea typeface="맑은 고딕"/>
-                <a:cs typeface="맑은 고딕"/>
-              </a:rPr>
-              <a:t>높음</a:t>
-            </a:r>
-          </a:p>
-        </p:txBody>
-      </p:sp>
-      <p:sp>
-        <p:nvSpPr>
-          <p:cNvPr id="9090" name="TextBox 9089"/>
-          <p:cNvSpPr txBox="1"/>
-          <p:nvPr/>
-        </p:nvSpPr>
-        <p:spPr>
-          <a:xfrm>
-            <a:off x="4581144" y="3840480"/>
-            <a:ext cx="1024128" cy="173736"/>
-          </a:xfrm>
-          <a:prstGeom prst="rect">
-            <a:avLst/>
-          </a:prstGeom>
-          <a:noFill/>
-        </p:spPr>
-        <p:txBody>
-          <a:bodyPr wrap="square" lIns="0" rIns="0" tIns="0" bIns="0" anchor="ctr">
-            <a:spAutoFit/>
-          </a:bodyPr>
-          <a:lstStyle/>
-          <a:p>
-            <a:pPr algn="l">
-              <a:lnSpc>
-                <a:spcPct val="100000"/>
-              </a:lnSpc>
-              <a:spcAft>
-                <a:spcPts val="0"/>
-              </a:spcAft>
-            </a:pPr>
-            <a:r>
-              <a:rPr sz="800" b="0" i="0">
-                <a:solidFill>
-                  <a:srgbClr val="595959"/>
-                </a:solidFill>
-                <a:latin typeface="맑은 고딕"/>
-                <a:ea typeface="맑은 고딕"/>
-                <a:cs typeface="맑은 고딕"/>
-              </a:rPr>
-              <a:t>D 노드 부하</a:t>
-            </a:r>
-          </a:p>
-        </p:txBody>
-      </p:sp>
-      <p:sp>
-        <p:nvSpPr>
-          <p:cNvPr id="9091" name="TextBox 9090"/>
-          <p:cNvSpPr txBox="1"/>
-          <p:nvPr/>
-        </p:nvSpPr>
-        <p:spPr>
-          <a:xfrm>
-            <a:off x="5641848" y="3840480"/>
-            <a:ext cx="1947672" cy="173736"/>
-          </a:xfrm>
-          <a:prstGeom prst="rect">
-            <a:avLst/>
-          </a:prstGeom>
-          <a:noFill/>
-        </p:spPr>
-        <p:txBody>
-          <a:bodyPr wrap="square" lIns="0" rIns="0" tIns="0" bIns="0" anchor="ctr">
-            <a:spAutoFit/>
-          </a:bodyPr>
-          <a:lstStyle/>
-          <a:p>
-            <a:pPr algn="l">
-              <a:lnSpc>
-                <a:spcPct val="100000"/>
-              </a:lnSpc>
-              <a:spcAft>
-                <a:spcPts val="0"/>
-              </a:spcAft>
-            </a:pPr>
-            <a:r>
-              <a:rPr sz="800" b="1" i="0">
-                <a:solidFill>
-                  <a:srgbClr val="548235"/>
-                </a:solidFill>
-                <a:latin typeface="맑은 고딕"/>
-                <a:ea typeface="맑은 고딕"/>
-                <a:cs typeface="맑은 고딕"/>
-              </a:rPr>
-              <a:t>낮음</a:t>
-            </a:r>
-          </a:p>
-        </p:txBody>
-      </p:sp>
-      <p:sp>
-        <p:nvSpPr>
-          <p:cNvPr id="9092" name="Rounded Rectangle 9091"/>
-          <p:cNvSpPr/>
-          <p:nvPr/>
-        </p:nvSpPr>
-        <p:spPr>
-          <a:xfrm>
-            <a:off x="4471416" y="4151376"/>
-            <a:ext cx="3227832" cy="384048"/>
-          </a:xfrm>
-          <a:prstGeom prst="roundRect">
-            <a:avLst>
-              <a:gd name="adj" fmla="val 10000"/>
+              <a:gd name="adj" fmla="val 8000"/>
             </a:avLst>
           </a:prstGeom>
           <a:solidFill>
@@ -8479,44 +7028,284 @@
                 <a:spcPct val="100000"/>
               </a:lnSpc>
               <a:spcAft>
+                <a:spcPts val="100"/>
+              </a:spcAft>
+            </a:pPr>
+            <a:r>
+              <a:rPr sz="950" b="1" i="0">
+                <a:solidFill>
+                  <a:srgbClr val="1F3864"/>
+                </a:solidFill>
+                <a:latin typeface="맑은 고딕"/>
+                <a:ea typeface="맑은 고딕"/>
+                <a:cs typeface="맑은 고딕"/>
+              </a:rPr>
+              <a:t>D 노드</a:t>
+            </a:r>
+          </a:p>
+          <a:p>
+            <a:pPr algn="ctr">
+              <a:lnSpc>
+                <a:spcPct val="100000"/>
+              </a:lnSpc>
+              <a:spcAft>
                 <a:spcPts val="0"/>
               </a:spcAft>
             </a:pPr>
             <a:r>
-              <a:rPr sz="1000" b="1" i="0">
-                <a:solidFill>
-                  <a:srgbClr val="1F3864"/>
-                </a:solidFill>
-                <a:latin typeface="맑은 고딕"/>
-                <a:ea typeface="맑은 고딕"/>
-                <a:cs typeface="맑은 고딕"/>
-              </a:rPr>
-              <a:t>→ </a:t>
-            </a:r>
-            <a:r>
-              <a:rPr sz="1050" b="1" i="0">
-                <a:solidFill>
-                  <a:srgbClr val="1F3864"/>
-                </a:solidFill>
-                <a:latin typeface="맑은 고딕"/>
-                <a:ea typeface="맑은 고딕"/>
-                <a:cs typeface="맑은 고딕"/>
-              </a:rPr>
-              <a:t>D 노드에서 Prefill</a:t>
-            </a:r>
-          </a:p>
-        </p:txBody>
-      </p:sp>
-      <p:sp>
-        <p:nvSpPr>
-          <p:cNvPr id="9093" name="TextBox 9092"/>
+              <a:rPr sz="700" b="0" i="0">
+                <a:solidFill>
+                  <a:srgbClr val="595959"/>
+                </a:solidFill>
+                <a:latin typeface="맑은 고딕"/>
+                <a:ea typeface="맑은 고딕"/>
+                <a:cs typeface="맑은 고딕"/>
+              </a:rPr>
+              <a:t>Decode 전용</a:t>
+            </a:r>
+          </a:p>
+        </p:txBody>
+      </p:sp>
+      <p:sp>
+        <p:nvSpPr>
+          <p:cNvPr id="9064" name="Rounded Rectangle 9063"/>
+          <p:cNvSpPr/>
+          <p:nvPr/>
+        </p:nvSpPr>
+        <p:spPr>
+          <a:xfrm>
+            <a:off x="1225296" y="2542032"/>
+            <a:ext cx="10616184" cy="1024128"/>
+          </a:xfrm>
+          <a:prstGeom prst="roundRect">
+            <a:avLst>
+              <a:gd name="adj" fmla="val 2000"/>
+            </a:avLst>
+          </a:prstGeom>
+          <a:solidFill>
+            <a:srgbClr val="FDF6F1"/>
+          </a:solidFill>
+          <a:ln w="9525">
+            <a:solidFill>
+              <a:srgbClr val="ED7D31"/>
+            </a:solidFill>
+          </a:ln>
+          <a:effectLst/>
+        </p:spPr>
+        <p:style>
+          <a:lnRef idx="1">
+            <a:schemeClr val="accent1"/>
+          </a:lnRef>
+          <a:fillRef idx="3">
+            <a:schemeClr val="accent1"/>
+          </a:fillRef>
+          <a:effectRef idx="2">
+            <a:schemeClr val="accent1"/>
+          </a:effectRef>
+          <a:fontRef idx="minor">
+            <a:schemeClr val="lt1"/>
+          </a:fontRef>
+        </p:style>
+        <p:txBody>
+          <a:bodyPr rtlCol="0" anchor="ctr" wrap="square" lIns="54864" rIns="54864" tIns="0" bIns="0"/>
+          <a:lstStyle/>
+          <a:p>
+            <a:pPr algn="l">
+              <a:lnSpc>
+                <a:spcPct val="100000"/>
+              </a:lnSpc>
+              <a:spcAft>
+                <a:spcPts val="0"/>
+              </a:spcAft>
+            </a:pPr>
+            <a:r>
+              <a:rPr sz="100" b="0" i="0">
+                <a:solidFill>
+                  <a:srgbClr val="000000"/>
+                </a:solidFill>
+                <a:latin typeface="맑은 고딕"/>
+                <a:ea typeface="맑은 고딕"/>
+                <a:cs typeface="맑은 고딕"/>
+              </a:rPr>
+              <a:t/>
+            </a:r>
+          </a:p>
+        </p:txBody>
+      </p:sp>
+      <p:sp>
+        <p:nvSpPr>
+          <p:cNvPr id="9065" name="Rounded Rectangle 9064"/>
+          <p:cNvSpPr/>
+          <p:nvPr/>
+        </p:nvSpPr>
+        <p:spPr>
+          <a:xfrm>
+            <a:off x="1225296" y="3895344"/>
+            <a:ext cx="10616184" cy="1024128"/>
+          </a:xfrm>
+          <a:prstGeom prst="roundRect">
+            <a:avLst>
+              <a:gd name="adj" fmla="val 2000"/>
+            </a:avLst>
+          </a:prstGeom>
+          <a:solidFill>
+            <a:srgbClr val="F2F8FD"/>
+          </a:solidFill>
+          <a:ln w="9525">
+            <a:solidFill>
+              <a:srgbClr val="2E75B6"/>
+            </a:solidFill>
+          </a:ln>
+          <a:effectLst/>
+        </p:spPr>
+        <p:style>
+          <a:lnRef idx="1">
+            <a:schemeClr val="accent1"/>
+          </a:lnRef>
+          <a:fillRef idx="3">
+            <a:schemeClr val="accent1"/>
+          </a:fillRef>
+          <a:effectRef idx="2">
+            <a:schemeClr val="accent1"/>
+          </a:effectRef>
+          <a:fontRef idx="minor">
+            <a:schemeClr val="lt1"/>
+          </a:fontRef>
+        </p:style>
+        <p:txBody>
+          <a:bodyPr rtlCol="0" anchor="ctr" wrap="square" lIns="54864" rIns="54864" tIns="0" bIns="0"/>
+          <a:lstStyle/>
+          <a:p>
+            <a:pPr algn="l">
+              <a:lnSpc>
+                <a:spcPct val="100000"/>
+              </a:lnSpc>
+              <a:spcAft>
+                <a:spcPts val="0"/>
+              </a:spcAft>
+            </a:pPr>
+            <a:r>
+              <a:rPr sz="100" b="0" i="0">
+                <a:solidFill>
+                  <a:srgbClr val="000000"/>
+                </a:solidFill>
+                <a:latin typeface="맑은 고딕"/>
+                <a:ea typeface="맑은 고딕"/>
+                <a:cs typeface="맑은 고딕"/>
+              </a:rPr>
+              <a:t/>
+            </a:r>
+          </a:p>
+        </p:txBody>
+      </p:sp>
+      <p:cxnSp>
+        <p:nvCxnSpPr>
+          <p:cNvPr id="9066" name="Connector 9065"/>
+          <p:cNvCxnSpPr/>
+          <p:nvPr/>
+        </p:nvCxnSpPr>
+        <p:spPr>
+          <a:xfrm>
+            <a:off x="1225296" y="3730752"/>
+            <a:ext cx="10616184" cy="0"/>
+          </a:xfrm>
+          <a:prstGeom prst="line">
+            <a:avLst/>
+          </a:prstGeom>
+          <a:ln w="12700">
+            <a:solidFill>
+              <a:srgbClr val="E06666"/>
+            </a:solidFill>
+            <a:prstDash val="dash"/>
+          </a:ln>
+        </p:spPr>
+        <p:style>
+          <a:lnRef idx="2">
+            <a:schemeClr val="accent1"/>
+          </a:lnRef>
+          <a:fillRef idx="0">
+            <a:schemeClr val="accent1"/>
+          </a:fillRef>
+          <a:effectRef idx="1">
+            <a:schemeClr val="accent1"/>
+          </a:effectRef>
+          <a:fontRef idx="minor">
+            <a:schemeClr val="tx1"/>
+          </a:fontRef>
+        </p:style>
+      </p:cxnSp>
+      <p:sp>
+        <p:nvSpPr>
+          <p:cNvPr id="9067" name="Rectangle 9066"/>
+          <p:cNvSpPr/>
+          <p:nvPr/>
+        </p:nvSpPr>
+        <p:spPr>
+          <a:xfrm>
+            <a:off x="7589520" y="3630168"/>
+            <a:ext cx="4251960" cy="201168"/>
+          </a:xfrm>
+          <a:prstGeom prst="rect">
+            <a:avLst/>
+          </a:prstGeom>
+          <a:solidFill>
+            <a:srgbClr val="FFFFFF"/>
+          </a:solidFill>
+          <a:ln>
+            <a:noFill/>
+          </a:ln>
+          <a:effectLst/>
+        </p:spPr>
+        <p:style>
+          <a:lnRef idx="1">
+            <a:schemeClr val="accent1"/>
+          </a:lnRef>
+          <a:fillRef idx="3">
+            <a:schemeClr val="accent1"/>
+          </a:fillRef>
+          <a:effectRef idx="2">
+            <a:schemeClr val="accent1"/>
+          </a:effectRef>
+          <a:fontRef idx="minor">
+            <a:schemeClr val="lt1"/>
+          </a:fontRef>
+        </p:style>
+        <p:txBody>
+          <a:bodyPr rtlCol="0" anchor="ctr" wrap="square" lIns="54864" rIns="54864" tIns="0" bIns="0"/>
+          <a:lstStyle/>
+          <a:p>
+            <a:pPr algn="ctr">
+              <a:lnSpc>
+                <a:spcPct val="100000"/>
+              </a:lnSpc>
+              <a:spcAft>
+                <a:spcPts val="0"/>
+              </a:spcAft>
+            </a:pPr>
+            <a:r>
+              <a:rPr sz="750" b="1" i="0">
+                <a:solidFill>
+                  <a:srgbClr val="C00000"/>
+                </a:solidFill>
+                <a:latin typeface="맑은 고딕"/>
+                <a:ea typeface="맑은 고딕"/>
+                <a:cs typeface="맑은 고딕"/>
+              </a:rPr>
+              <a:t>노드 간 링크 — KV 캐시가 이 선을 넘을 때마다 전송 비용 발생</a:t>
+            </a:r>
+          </a:p>
+        </p:txBody>
+      </p:sp>
+      <p:sp>
+        <p:nvSpPr>
+          <p:cNvPr id="9068" name="TextBox 9067"/>
           <p:cNvSpPr txBox="1"/>
           <p:nvPr/>
         </p:nvSpPr>
         <p:spPr>
           <a:xfrm>
-            <a:off x="4471416" y="4608576"/>
-            <a:ext cx="3227832" cy="402336"/>
+            <a:off x="1325880" y="2286000"/>
+            <a:ext cx="2697480" cy="219456"/>
           </a:xfrm>
           <a:prstGeom prst="rect">
             <a:avLst/>
@@ -8531,14 +7320,25 @@
           <a:p>
             <a:pPr algn="l">
               <a:lnSpc>
-                <a:spcPct val="120000"/>
+                <a:spcPct val="100000"/>
               </a:lnSpc>
               <a:spcAft>
                 <a:spcPts val="0"/>
               </a:spcAft>
             </a:pPr>
             <a:r>
-              <a:rPr sz="800" b="0" i="0">
+              <a:rPr sz="850" b="1" i="0">
+                <a:solidFill>
+                  <a:srgbClr val="1F3864"/>
+                </a:solidFill>
+                <a:latin typeface="맑은 고딕"/>
+                <a:ea typeface="맑은 고딕"/>
+                <a:cs typeface="맑은 고딕"/>
+              </a:rPr>
+              <a:t>Turn 1</a:t>
+            </a:r>
+            <a:r>
+              <a:rPr sz="850" b="0" i="0">
                 <a:solidFill>
                   <a:srgbClr val="595959"/>
                 </a:solidFill>
@@ -8546,23 +7346,87 @@
                 <a:ea typeface="맑은 고딕"/>
                 <a:cs typeface="맑은 고딕"/>
               </a:rPr>
-              <a:t>할 일이 적은데 P로 보내면 KV 전송 + P 대기 비용이 더 큼 → D에서 바로 처리</a:t>
-            </a:r>
-          </a:p>
-        </p:txBody>
-      </p:sp>
-      <p:sp>
-        <p:nvSpPr>
-          <p:cNvPr id="9094" name="Right Arrow 9093"/>
+              <a:t>  ·  사용자 질문 2,000 토큰</a:t>
+            </a:r>
+          </a:p>
+        </p:txBody>
+      </p:sp>
+      <p:sp>
+        <p:nvSpPr>
+          <p:cNvPr id="9069" name="Rounded Rectangle 9068"/>
           <p:cNvSpPr/>
           <p:nvPr/>
         </p:nvSpPr>
         <p:spPr>
           <a:xfrm>
-            <a:off x="7936992" y="3401568"/>
-            <a:ext cx="274320" cy="182880"/>
-          </a:xfrm>
-          <a:prstGeom prst="rightArrow">
+            <a:off x="1417320" y="2779776"/>
+            <a:ext cx="1051560" cy="530352"/>
+          </a:xfrm>
+          <a:prstGeom prst="roundRect">
+            <a:avLst>
+              <a:gd name="adj" fmla="val 10000"/>
+            </a:avLst>
+          </a:prstGeom>
+          <a:solidFill>
+            <a:srgbClr val="ED7D31"/>
+          </a:solidFill>
+          <a:ln>
+            <a:noFill/>
+          </a:ln>
+          <a:effectLst/>
+        </p:spPr>
+        <p:style>
+          <a:lnRef idx="1">
+            <a:schemeClr val="accent1"/>
+          </a:lnRef>
+          <a:fillRef idx="3">
+            <a:schemeClr val="accent1"/>
+          </a:fillRef>
+          <a:effectRef idx="2">
+            <a:schemeClr val="accent1"/>
+          </a:effectRef>
+          <a:fontRef idx="minor">
+            <a:schemeClr val="lt1"/>
+          </a:fontRef>
+        </p:style>
+        <p:txBody>
+          <a:bodyPr rtlCol="0" anchor="ctr" wrap="square" lIns="54864" rIns="54864" tIns="0" bIns="0"/>
+          <a:lstStyle/>
+          <a:p>
+            <a:pPr algn="ctr">
+              <a:lnSpc>
+                <a:spcPct val="100000"/>
+              </a:lnSpc>
+              <a:spcAft>
+                <a:spcPts val="0"/>
+              </a:spcAft>
+            </a:pPr>
+            <a:r>
+              <a:rPr sz="900" b="1" i="0">
+                <a:solidFill>
+                  <a:srgbClr val="FFFFFF"/>
+                </a:solidFill>
+                <a:latin typeface="맑은 고딕"/>
+                <a:ea typeface="맑은 고딕"/>
+                <a:cs typeface="맑은 고딕"/>
+              </a:rPr>
+              <a:t>Prefill</a:t>
+            </a:r>
+          </a:p>
+        </p:txBody>
+      </p:sp>
+      <p:sp>
+        <p:nvSpPr>
+          <p:cNvPr id="9070" name="Down Arrow 9069"/>
+          <p:cNvSpPr/>
+          <p:nvPr/>
+        </p:nvSpPr>
+        <p:spPr>
+          <a:xfrm>
+            <a:off x="1847088" y="3328416"/>
+            <a:ext cx="201168" cy="786384"/>
+          </a:xfrm>
+          <a:prstGeom prst="downArrow">
             <a:avLst/>
           </a:prstGeom>
           <a:solidFill>
@@ -8615,71 +7479,23 @@
       </p:sp>
       <p:sp>
         <p:nvSpPr>
-          <p:cNvPr id="9095" name="TextBox 9094"/>
-          <p:cNvSpPr txBox="1"/>
-          <p:nvPr/>
-        </p:nvSpPr>
-        <p:spPr>
-          <a:xfrm>
-            <a:off x="7799831" y="3621024"/>
-            <a:ext cx="548640" cy="182880"/>
+          <p:cNvPr id="9071" name="Rectangle 9070"/>
+          <p:cNvSpPr/>
+          <p:nvPr/>
+        </p:nvSpPr>
+        <p:spPr>
+          <a:xfrm>
+            <a:off x="2084831" y="3630168"/>
+            <a:ext cx="896112" cy="182880"/>
           </a:xfrm>
           <a:prstGeom prst="rect">
             <a:avLst/>
-          </a:prstGeom>
-          <a:noFill/>
-        </p:spPr>
-        <p:txBody>
-          <a:bodyPr wrap="square" lIns="0" rIns="0" tIns="0" bIns="0" anchor="t">
-            <a:spAutoFit/>
-          </a:bodyPr>
-          <a:lstStyle/>
-          <a:p>
-            <a:pPr algn="ctr">
-              <a:lnSpc>
-                <a:spcPct val="100000"/>
-              </a:lnSpc>
-              <a:spcAft>
-                <a:spcPts val="0"/>
-              </a:spcAft>
-            </a:pPr>
-            <a:r>
-              <a:rPr sz="700" b="0" i="0">
-                <a:solidFill>
-                  <a:srgbClr val="808080"/>
-                </a:solidFill>
-                <a:latin typeface="맑은 고딕"/>
-                <a:ea typeface="맑은 고딕"/>
-                <a:cs typeface="맑은 고딕"/>
-              </a:rPr>
-              <a:t>Tool 호출</a:t>
-            </a:r>
-          </a:p>
-        </p:txBody>
-      </p:sp>
-      <p:sp>
-        <p:nvSpPr>
-          <p:cNvPr id="9096" name="Rounded Rectangle 9095"/>
-          <p:cNvSpPr/>
-          <p:nvPr/>
-        </p:nvSpPr>
-        <p:spPr>
-          <a:xfrm>
-            <a:off x="8302752" y="2286000"/>
-            <a:ext cx="3520440" cy="2788920"/>
-          </a:xfrm>
-          <a:prstGeom prst="roundRect">
-            <a:avLst>
-              <a:gd name="adj" fmla="val 3500"/>
-            </a:avLst>
           </a:prstGeom>
           <a:solidFill>
             <a:srgbClr val="FFFFFF"/>
           </a:solidFill>
-          <a:ln w="12700">
-            <a:solidFill>
-              <a:srgbClr val="D9D9D9"/>
-            </a:solidFill>
+          <a:ln>
+            <a:noFill/>
           </a:ln>
           <a:effectLst/>
         </p:spPr>
@@ -8698,10 +7514,10 @@
           </a:fontRef>
         </p:style>
         <p:txBody>
-          <a:bodyPr rtlCol="0" anchor="ctr" wrap="square" lIns="54864" rIns="54864" tIns="0" bIns="0"/>
-          <a:lstStyle/>
-          <a:p>
-            <a:pPr algn="l">
+          <a:bodyPr rtlCol="0" anchor="ctr" wrap="square" lIns="18288" rIns="18288" tIns="0" bIns="0"/>
+          <a:lstStyle/>
+          <a:p>
+            <a:pPr algn="ctr">
               <a:lnSpc>
                 <a:spcPct val="100000"/>
               </a:lnSpc>
@@ -8710,37 +7526,35 @@
               </a:spcAft>
             </a:pPr>
             <a:r>
-              <a:rPr sz="100" b="0" i="0">
-                <a:solidFill>
-                  <a:srgbClr val="000000"/>
-                </a:solidFill>
-                <a:latin typeface="맑은 고딕"/>
-                <a:ea typeface="맑은 고딕"/>
-                <a:cs typeface="맑은 고딕"/>
-              </a:rPr>
-              <a:t/>
-            </a:r>
-          </a:p>
-        </p:txBody>
-      </p:sp>
-      <p:sp>
-        <p:nvSpPr>
-          <p:cNvPr id="9097" name="Rounded Rectangle 9096"/>
+              <a:rPr sz="700" b="0" i="0">
+                <a:solidFill>
+                  <a:srgbClr val="595959"/>
+                </a:solidFill>
+                <a:latin typeface="맑은 고딕"/>
+                <a:ea typeface="맑은 고딕"/>
+                <a:cs typeface="맑은 고딕"/>
+              </a:rPr>
+              <a:t>KV 캐시 전송</a:t>
+            </a:r>
+          </a:p>
+        </p:txBody>
+      </p:sp>
+      <p:sp>
+        <p:nvSpPr>
+          <p:cNvPr id="9072" name="Right Arrow 9071"/>
           <p:cNvSpPr/>
           <p:nvPr/>
         </p:nvSpPr>
         <p:spPr>
           <a:xfrm>
-            <a:off x="8302752" y="2286000"/>
-            <a:ext cx="3520440" cy="310896"/>
-          </a:xfrm>
-          <a:prstGeom prst="roundRect">
-            <a:avLst>
-              <a:gd name="adj" fmla="val 10000"/>
-            </a:avLst>
+            <a:off x="2121408" y="4133087"/>
+            <a:ext cx="640080" cy="146304"/>
+          </a:xfrm>
+          <a:prstGeom prst="rightArrow">
+            <a:avLst/>
           </a:prstGeom>
           <a:solidFill>
-            <a:srgbClr val="1F3864"/>
+            <a:srgbClr val="808080"/>
           </a:solidFill>
           <a:ln>
             <a:noFill/>
@@ -8765,7 +7579,7 @@
           <a:bodyPr rtlCol="0" anchor="ctr" wrap="square" lIns="54864" rIns="54864" tIns="0" bIns="0"/>
           <a:lstStyle/>
           <a:p>
-            <a:pPr algn="ctr">
+            <a:pPr algn="l">
               <a:lnSpc>
                 <a:spcPct val="100000"/>
               </a:lnSpc>
@@ -8774,7 +7588,137 @@
               </a:spcAft>
             </a:pPr>
             <a:r>
-              <a:rPr sz="1050" b="1" i="0">
+              <a:rPr sz="100" b="0" i="0">
+                <a:solidFill>
+                  <a:srgbClr val="000000"/>
+                </a:solidFill>
+                <a:latin typeface="맑은 고딕"/>
+                <a:ea typeface="맑은 고딕"/>
+                <a:cs typeface="맑은 고딕"/>
+              </a:rPr>
+              <a:t/>
+            </a:r>
+          </a:p>
+        </p:txBody>
+      </p:sp>
+      <p:sp>
+        <p:nvSpPr>
+          <p:cNvPr id="9073" name="Rounded Rectangle 9072"/>
+          <p:cNvSpPr/>
+          <p:nvPr/>
+        </p:nvSpPr>
+        <p:spPr>
+          <a:xfrm>
+            <a:off x="2834640" y="4005072"/>
+            <a:ext cx="1207008" cy="384048"/>
+          </a:xfrm>
+          <a:prstGeom prst="roundRect">
+            <a:avLst>
+              <a:gd name="adj" fmla="val 12000"/>
+            </a:avLst>
+          </a:prstGeom>
+          <a:solidFill>
+            <a:srgbClr val="FFFFFF"/>
+          </a:solidFill>
+          <a:ln w="19050">
+            <a:solidFill>
+              <a:srgbClr val="2E75B6"/>
+            </a:solidFill>
+          </a:ln>
+          <a:effectLst/>
+        </p:spPr>
+        <p:style>
+          <a:lnRef idx="1">
+            <a:schemeClr val="accent1"/>
+          </a:lnRef>
+          <a:fillRef idx="3">
+            <a:schemeClr val="accent1"/>
+          </a:fillRef>
+          <a:effectRef idx="2">
+            <a:schemeClr val="accent1"/>
+          </a:effectRef>
+          <a:fontRef idx="minor">
+            <a:schemeClr val="lt1"/>
+          </a:fontRef>
+        </p:style>
+        <p:txBody>
+          <a:bodyPr rtlCol="0" anchor="ctr" wrap="square" lIns="54864" rIns="54864" tIns="0" bIns="0"/>
+          <a:lstStyle/>
+          <a:p>
+            <a:pPr algn="ctr">
+              <a:lnSpc>
+                <a:spcPct val="100000"/>
+              </a:lnSpc>
+              <a:spcAft>
+                <a:spcPts val="0"/>
+              </a:spcAft>
+            </a:pPr>
+            <a:r>
+              <a:rPr sz="750" b="1" i="0">
+                <a:solidFill>
+                  <a:srgbClr val="1F3864"/>
+                </a:solidFill>
+                <a:latin typeface="맑은 고딕"/>
+                <a:ea typeface="맑은 고딕"/>
+                <a:cs typeface="맑은 고딕"/>
+              </a:rPr>
+              <a:t>KV 캐시 2,000</a:t>
+            </a:r>
+          </a:p>
+        </p:txBody>
+      </p:sp>
+      <p:sp>
+        <p:nvSpPr>
+          <p:cNvPr id="9074" name="Rounded Rectangle 9073"/>
+          <p:cNvSpPr/>
+          <p:nvPr/>
+        </p:nvSpPr>
+        <p:spPr>
+          <a:xfrm>
+            <a:off x="2834640" y="4443984"/>
+            <a:ext cx="1207008" cy="384048"/>
+          </a:xfrm>
+          <a:prstGeom prst="roundRect">
+            <a:avLst>
+              <a:gd name="adj" fmla="val 10000"/>
+            </a:avLst>
+          </a:prstGeom>
+          <a:solidFill>
+            <a:srgbClr val="2E75B6"/>
+          </a:solidFill>
+          <a:ln>
+            <a:noFill/>
+          </a:ln>
+          <a:effectLst/>
+        </p:spPr>
+        <p:style>
+          <a:lnRef idx="1">
+            <a:schemeClr val="accent1"/>
+          </a:lnRef>
+          <a:fillRef idx="3">
+            <a:schemeClr val="accent1"/>
+          </a:fillRef>
+          <a:effectRef idx="2">
+            <a:schemeClr val="accent1"/>
+          </a:effectRef>
+          <a:fontRef idx="minor">
+            <a:schemeClr val="lt1"/>
+          </a:fontRef>
+        </p:style>
+        <p:txBody>
+          <a:bodyPr rtlCol="0" anchor="ctr" wrap="square" lIns="54864" rIns="54864" tIns="0" bIns="0"/>
+          <a:lstStyle/>
+          <a:p>
+            <a:pPr algn="ctr">
+              <a:lnSpc>
+                <a:spcPct val="100000"/>
+              </a:lnSpc>
+              <a:spcAft>
+                <a:spcPts val="0"/>
+              </a:spcAft>
+            </a:pPr>
+            <a:r>
+              <a:rPr sz="850" b="1" i="0">
                 <a:solidFill>
                   <a:srgbClr val="FFFFFF"/>
                 </a:solidFill>
@@ -8782,32 +7726,57 @@
                 <a:ea typeface="맑은 고딕"/>
                 <a:cs typeface="맑은 고딕"/>
               </a:rPr>
-              <a:t>Turn 3</a:t>
-            </a:r>
-            <a:r>
-              <a:rPr sz="900" b="0" i="0">
-                <a:solidFill>
-                  <a:srgbClr val="FFFFFF"/>
-                </a:solidFill>
-                <a:latin typeface="맑은 고딕"/>
-                <a:ea typeface="맑은 고딕"/>
-                <a:cs typeface="맑은 고딕"/>
-              </a:rPr>
-              <a:t>   ·   Tool 결과가 큼</a:t>
-            </a:r>
-          </a:p>
-        </p:txBody>
-      </p:sp>
-      <p:sp>
-        <p:nvSpPr>
-          <p:cNvPr id="9098" name="TextBox 9097"/>
+              <a:t>Decode</a:t>
+            </a:r>
+          </a:p>
+        </p:txBody>
+      </p:sp>
+      <p:cxnSp>
+        <p:nvCxnSpPr>
+          <p:cNvPr id="9075" name="Connector 9074"/>
+          <p:cNvCxnSpPr/>
+          <p:nvPr/>
+        </p:nvCxnSpPr>
+        <p:spPr>
+          <a:xfrm>
+            <a:off x="4224528" y="2267712"/>
+            <a:ext cx="0" cy="2688336"/>
+          </a:xfrm>
+          <a:prstGeom prst="line">
+            <a:avLst/>
+          </a:prstGeom>
+          <a:ln w="12700">
+            <a:solidFill>
+              <a:srgbClr val="D9D9D9"/>
+            </a:solidFill>
+            <a:prstDash val="dash"/>
+          </a:ln>
+        </p:spPr>
+        <p:style>
+          <a:lnRef idx="2">
+            <a:schemeClr val="accent1"/>
+          </a:lnRef>
+          <a:fillRef idx="0">
+            <a:schemeClr val="accent1"/>
+          </a:fillRef>
+          <a:effectRef idx="1">
+            <a:schemeClr val="accent1"/>
+          </a:effectRef>
+          <a:fontRef idx="minor">
+            <a:schemeClr val="tx1"/>
+          </a:fontRef>
+        </p:style>
+      </p:cxnSp>
+      <p:sp>
+        <p:nvSpPr>
+          <p:cNvPr id="9076" name="TextBox 9075"/>
           <p:cNvSpPr txBox="1"/>
           <p:nvPr/>
         </p:nvSpPr>
         <p:spPr>
           <a:xfrm>
-            <a:off x="8449056" y="2670048"/>
-            <a:ext cx="3227832" cy="292608"/>
+            <a:off x="4370832" y="2286000"/>
+            <a:ext cx="7406640" cy="219456"/>
           </a:xfrm>
           <a:prstGeom prst="rect">
             <a:avLst/>
@@ -8822,25 +7791,25 @@
           <a:p>
             <a:pPr algn="l">
               <a:lnSpc>
-                <a:spcPct val="115000"/>
+                <a:spcPct val="100000"/>
               </a:lnSpc>
               <a:spcAft>
                 <a:spcPts val="0"/>
               </a:spcAft>
             </a:pPr>
             <a:r>
-              <a:rPr sz="800" b="1" i="0">
-                <a:solidFill>
-                  <a:srgbClr val="808080"/>
-                </a:solidFill>
-                <a:latin typeface="맑은 고딕"/>
-                <a:ea typeface="맑은 고딕"/>
-                <a:cs typeface="맑은 고딕"/>
-              </a:rPr>
-              <a:t>입력 :  </a:t>
-            </a:r>
-            <a:r>
-              <a:rPr sz="800" b="0" i="0">
+              <a:rPr sz="850" b="1" i="0">
+                <a:solidFill>
+                  <a:srgbClr val="1F3864"/>
+                </a:solidFill>
+                <a:latin typeface="맑은 고딕"/>
+                <a:ea typeface="맑은 고딕"/>
+                <a:cs typeface="맑은 고딕"/>
+              </a:rPr>
+              <a:t>Turn 2</a:t>
+            </a:r>
+            <a:r>
+              <a:rPr sz="850" b="0" i="0">
                 <a:solidFill>
                   <a:srgbClr val="595959"/>
                 </a:solidFill>
@@ -8848,29 +7817,40 @@
                 <a:ea typeface="맑은 고딕"/>
                 <a:cs typeface="맑은 고딕"/>
               </a:rPr>
-              <a:t>Tool 결과 1,000 토큰  (추가 입력이 큼)</a:t>
-            </a:r>
-          </a:p>
-        </p:txBody>
-      </p:sp>
-      <p:sp>
-        <p:nvSpPr>
-          <p:cNvPr id="9099" name="Rounded Rectangle 9098"/>
+              <a:t>  ·  Tool 결과 도착 — </a:t>
+            </a:r>
+            <a:r>
+              <a:rPr sz="850" b="1" i="0">
+                <a:solidFill>
+                  <a:srgbClr val="C00000"/>
+                </a:solidFill>
+                <a:latin typeface="맑은 고딕"/>
+                <a:ea typeface="맑은 고딕"/>
+                <a:cs typeface="맑은 고딕"/>
+              </a:rPr>
+              <a:t>History KV는 D에 있는데, 이 새 입력의 Prefill을 어디서 할 것인가?</a:t>
+            </a:r>
+          </a:p>
+        </p:txBody>
+      </p:sp>
+      <p:sp>
+        <p:nvSpPr>
+          <p:cNvPr id="9077" name="Rounded Rectangle 9076"/>
           <p:cNvSpPr/>
           <p:nvPr/>
         </p:nvSpPr>
         <p:spPr>
           <a:xfrm>
-            <a:off x="8449056" y="3035808"/>
-            <a:ext cx="3227832" cy="1005840"/>
+            <a:off x="4462272" y="4005072"/>
+            <a:ext cx="1133856" cy="384048"/>
           </a:xfrm>
           <a:prstGeom prst="roundRect">
             <a:avLst>
-              <a:gd name="adj" fmla="val 6000"/>
+              <a:gd name="adj" fmla="val 12000"/>
             </a:avLst>
           </a:prstGeom>
           <a:solidFill>
-            <a:srgbClr val="F7F9FC"/>
+            <a:srgbClr val="F2F2F2"/>
           </a:solidFill>
           <a:ln w="9525">
             <a:solidFill>
@@ -8897,7 +7877,7 @@
           <a:bodyPr rtlCol="0" anchor="ctr" wrap="square" lIns="54864" rIns="54864" tIns="0" bIns="0"/>
           <a:lstStyle/>
           <a:p>
-            <a:pPr algn="l">
+            <a:pPr algn="ctr">
               <a:lnSpc>
                 <a:spcPct val="100000"/>
               </a:lnSpc>
@@ -8906,42 +7886,64 @@
               </a:spcAft>
             </a:pPr>
             <a:r>
-              <a:rPr sz="100" b="0" i="0">
-                <a:solidFill>
-                  <a:srgbClr val="000000"/>
-                </a:solidFill>
-                <a:latin typeface="맑은 고딕"/>
-                <a:ea typeface="맑은 고딕"/>
-                <a:cs typeface="맑은 고딕"/>
-              </a:rPr>
-              <a:t/>
-            </a:r>
-          </a:p>
-        </p:txBody>
-      </p:sp>
-      <p:sp>
-        <p:nvSpPr>
-          <p:cNvPr id="9100" name="TextBox 9099"/>
-          <p:cNvSpPr txBox="1"/>
-          <p:nvPr/>
-        </p:nvSpPr>
-        <p:spPr>
-          <a:xfrm>
-            <a:off x="8558784" y="3099815"/>
-            <a:ext cx="3008376" cy="164592"/>
-          </a:xfrm>
-          <a:prstGeom prst="rect">
-            <a:avLst/>
-          </a:prstGeom>
-          <a:noFill/>
-        </p:spPr>
-        <p:txBody>
-          <a:bodyPr wrap="square" lIns="0" rIns="0" tIns="0" bIns="0" anchor="t">
-            <a:spAutoFit/>
-          </a:bodyPr>
-          <a:lstStyle/>
-          <a:p>
-            <a:pPr algn="l">
+              <a:rPr sz="700" b="0" i="0">
+                <a:solidFill>
+                  <a:srgbClr val="595959"/>
+                </a:solidFill>
+                <a:latin typeface="맑은 고딕"/>
+                <a:ea typeface="맑은 고딕"/>
+                <a:cs typeface="맑은 고딕"/>
+              </a:rPr>
+              <a:t>Tool 결과 ΔInput</a:t>
+            </a:r>
+          </a:p>
+        </p:txBody>
+      </p:sp>
+      <p:sp>
+        <p:nvSpPr>
+          <p:cNvPr id="9078" name="Rounded Rectangle 9077"/>
+          <p:cNvSpPr/>
+          <p:nvPr/>
+        </p:nvSpPr>
+        <p:spPr>
+          <a:xfrm>
+            <a:off x="4462272" y="4443984"/>
+            <a:ext cx="1133856" cy="384048"/>
+          </a:xfrm>
+          <a:prstGeom prst="roundRect">
+            <a:avLst>
+              <a:gd name="adj" fmla="val 12000"/>
+            </a:avLst>
+          </a:prstGeom>
+          <a:solidFill>
+            <a:srgbClr val="FFFFFF"/>
+          </a:solidFill>
+          <a:ln w="19050">
+            <a:solidFill>
+              <a:srgbClr val="2E75B6"/>
+            </a:solidFill>
+          </a:ln>
+          <a:effectLst/>
+        </p:spPr>
+        <p:style>
+          <a:lnRef idx="1">
+            <a:schemeClr val="accent1"/>
+          </a:lnRef>
+          <a:fillRef idx="3">
+            <a:schemeClr val="accent1"/>
+          </a:fillRef>
+          <a:effectRef idx="2">
+            <a:schemeClr val="accent1"/>
+          </a:effectRef>
+          <a:fontRef idx="minor">
+            <a:schemeClr val="lt1"/>
+          </a:fontRef>
+        </p:style>
+        <p:txBody>
+          <a:bodyPr rtlCol="0" anchor="ctr" wrap="square" lIns="54864" rIns="54864" tIns="0" bIns="0"/>
+          <a:lstStyle/>
+          <a:p>
+            <a:pPr algn="ctr">
               <a:lnSpc>
                 <a:spcPct val="100000"/>
               </a:lnSpc>
@@ -8952,37 +7954,55 @@
             <a:r>
               <a:rPr sz="750" b="1" i="0">
                 <a:solidFill>
-                  <a:srgbClr val="808080"/>
-                </a:solidFill>
-                <a:latin typeface="맑은 고딕"/>
-                <a:ea typeface="맑은 고딕"/>
-                <a:cs typeface="맑은 고딕"/>
-              </a:rPr>
-              <a:t>이 시점의 상태</a:t>
-            </a:r>
-          </a:p>
-        </p:txBody>
-      </p:sp>
-      <p:sp>
-        <p:nvSpPr>
-          <p:cNvPr id="9101" name="TextBox 9100"/>
-          <p:cNvSpPr txBox="1"/>
-          <p:nvPr/>
-        </p:nvSpPr>
-        <p:spPr>
-          <a:xfrm>
-            <a:off x="8558784" y="3291839"/>
-            <a:ext cx="1024128" cy="173736"/>
-          </a:xfrm>
-          <a:prstGeom prst="rect">
-            <a:avLst/>
-          </a:prstGeom>
-          <a:noFill/>
-        </p:spPr>
-        <p:txBody>
-          <a:bodyPr wrap="square" lIns="0" rIns="0" tIns="0" bIns="0" anchor="ctr">
-            <a:spAutoFit/>
-          </a:bodyPr>
+                  <a:srgbClr val="1F3864"/>
+                </a:solidFill>
+                <a:latin typeface="맑은 고딕"/>
+                <a:ea typeface="맑은 고딕"/>
+                <a:cs typeface="맑은 고딕"/>
+              </a:rPr>
+              <a:t>History KV</a:t>
+            </a:r>
+          </a:p>
+        </p:txBody>
+      </p:sp>
+      <p:sp>
+        <p:nvSpPr>
+          <p:cNvPr id="9079" name="Right Arrow 9078"/>
+          <p:cNvSpPr/>
+          <p:nvPr/>
+        </p:nvSpPr>
+        <p:spPr>
+          <a:xfrm>
+            <a:off x="5614416" y="4343400"/>
+            <a:ext cx="128016" cy="128016"/>
+          </a:xfrm>
+          <a:prstGeom prst="rightArrow">
+            <a:avLst/>
+          </a:prstGeom>
+          <a:solidFill>
+            <a:srgbClr val="808080"/>
+          </a:solidFill>
+          <a:ln>
+            <a:noFill/>
+          </a:ln>
+          <a:effectLst/>
+        </p:spPr>
+        <p:style>
+          <a:lnRef idx="1">
+            <a:schemeClr val="accent1"/>
+          </a:lnRef>
+          <a:fillRef idx="3">
+            <a:schemeClr val="accent1"/>
+          </a:fillRef>
+          <a:effectRef idx="2">
+            <a:schemeClr val="accent1"/>
+          </a:effectRef>
+          <a:fontRef idx="minor">
+            <a:schemeClr val="lt1"/>
+          </a:fontRef>
+        </p:style>
+        <p:txBody>
+          <a:bodyPr rtlCol="0" anchor="ctr" wrap="square" lIns="54864" rIns="54864" tIns="0" bIns="0"/>
           <a:lstStyle/>
           <a:p>
             <a:pPr algn="l">
@@ -8994,42 +8014,62 @@
               </a:spcAft>
             </a:pPr>
             <a:r>
-              <a:rPr sz="800" b="0" i="0">
-                <a:solidFill>
-                  <a:srgbClr val="595959"/>
-                </a:solidFill>
-                <a:latin typeface="맑은 고딕"/>
-                <a:ea typeface="맑은 고딕"/>
-                <a:cs typeface="맑은 고딕"/>
-              </a:rPr>
-              <a:t>새 입력 크기</a:t>
-            </a:r>
-          </a:p>
-        </p:txBody>
-      </p:sp>
-      <p:sp>
-        <p:nvSpPr>
-          <p:cNvPr id="9102" name="TextBox 9101"/>
-          <p:cNvSpPr txBox="1"/>
-          <p:nvPr/>
-        </p:nvSpPr>
-        <p:spPr>
-          <a:xfrm>
-            <a:off x="9619488" y="3291839"/>
-            <a:ext cx="1947672" cy="173736"/>
-          </a:xfrm>
-          <a:prstGeom prst="rect">
-            <a:avLst/>
-          </a:prstGeom>
-          <a:noFill/>
-        </p:spPr>
-        <p:txBody>
-          <a:bodyPr wrap="square" lIns="0" rIns="0" tIns="0" bIns="0" anchor="ctr">
-            <a:spAutoFit/>
-          </a:bodyPr>
-          <a:lstStyle/>
-          <a:p>
-            <a:pPr algn="l">
+              <a:rPr sz="100" b="0" i="0">
+                <a:solidFill>
+                  <a:srgbClr val="000000"/>
+                </a:solidFill>
+                <a:latin typeface="맑은 고딕"/>
+                <a:ea typeface="맑은 고딕"/>
+                <a:cs typeface="맑은 고딕"/>
+              </a:rPr>
+              <a:t/>
+            </a:r>
+          </a:p>
+        </p:txBody>
+      </p:sp>
+      <p:sp>
+        <p:nvSpPr>
+          <p:cNvPr id="9080" name="Diamond 9079"/>
+          <p:cNvSpPr/>
+          <p:nvPr/>
+        </p:nvSpPr>
+        <p:spPr>
+          <a:xfrm>
+            <a:off x="5760720" y="4133087"/>
+            <a:ext cx="566928" cy="566928"/>
+          </a:xfrm>
+          <a:prstGeom prst="diamond">
+            <a:avLst/>
+          </a:prstGeom>
+          <a:solidFill>
+            <a:srgbClr val="FFF2CC"/>
+          </a:solidFill>
+          <a:ln w="12700">
+            <a:solidFill>
+              <a:srgbClr val="BF8F00"/>
+            </a:solidFill>
+          </a:ln>
+          <a:effectLst/>
+        </p:spPr>
+        <p:style>
+          <a:lnRef idx="1">
+            <a:schemeClr val="accent1"/>
+          </a:lnRef>
+          <a:fillRef idx="3">
+            <a:schemeClr val="accent1"/>
+          </a:fillRef>
+          <a:effectRef idx="2">
+            <a:schemeClr val="accent1"/>
+          </a:effectRef>
+          <a:fontRef idx="minor">
+            <a:schemeClr val="lt1"/>
+          </a:fontRef>
+        </p:style>
+        <p:txBody>
+          <a:bodyPr rtlCol="0" anchor="ctr" wrap="square" lIns="54864" rIns="54864" tIns="0" bIns="0"/>
+          <a:lstStyle/>
+          <a:p>
+            <a:pPr algn="ctr">
               <a:lnSpc>
                 <a:spcPct val="100000"/>
               </a:lnSpc>
@@ -9038,39 +8078,57 @@
               </a:spcAft>
             </a:pPr>
             <a:r>
-              <a:rPr sz="800" b="1" i="0">
-                <a:solidFill>
-                  <a:srgbClr val="C00000"/>
-                </a:solidFill>
-                <a:latin typeface="맑은 고딕"/>
-                <a:ea typeface="맑은 고딕"/>
-                <a:cs typeface="맑은 고딕"/>
-              </a:rPr>
-              <a:t>1,000 토큰 (큼)</a:t>
-            </a:r>
-          </a:p>
-        </p:txBody>
-      </p:sp>
-      <p:sp>
-        <p:nvSpPr>
-          <p:cNvPr id="9103" name="TextBox 9102"/>
-          <p:cNvSpPr txBox="1"/>
-          <p:nvPr/>
-        </p:nvSpPr>
-        <p:spPr>
-          <a:xfrm>
-            <a:off x="8558784" y="3474720"/>
-            <a:ext cx="1024128" cy="173736"/>
-          </a:xfrm>
-          <a:prstGeom prst="rect">
-            <a:avLst/>
-          </a:prstGeom>
-          <a:noFill/>
-        </p:spPr>
-        <p:txBody>
-          <a:bodyPr wrap="square" lIns="0" rIns="0" tIns="0" bIns="0" anchor="ctr">
-            <a:spAutoFit/>
-          </a:bodyPr>
+              <a:rPr sz="1300" b="1" i="0">
+                <a:solidFill>
+                  <a:srgbClr val="1F3864"/>
+                </a:solidFill>
+                <a:latin typeface="맑은 고딕"/>
+                <a:ea typeface="맑은 고딕"/>
+                <a:cs typeface="맑은 고딕"/>
+              </a:rPr>
+              <a:t>?</a:t>
+            </a:r>
+          </a:p>
+        </p:txBody>
+      </p:sp>
+      <p:sp>
+        <p:nvSpPr>
+          <p:cNvPr id="9081" name="Right Arrow 9080"/>
+          <p:cNvSpPr/>
+          <p:nvPr/>
+        </p:nvSpPr>
+        <p:spPr>
+          <a:xfrm>
+            <a:off x="6364224" y="4343400"/>
+            <a:ext cx="365760" cy="146304"/>
+          </a:xfrm>
+          <a:prstGeom prst="rightArrow">
+            <a:avLst/>
+          </a:prstGeom>
+          <a:solidFill>
+            <a:srgbClr val="2E75B6"/>
+          </a:solidFill>
+          <a:ln>
+            <a:noFill/>
+          </a:ln>
+          <a:effectLst/>
+        </p:spPr>
+        <p:style>
+          <a:lnRef idx="1">
+            <a:schemeClr val="accent1"/>
+          </a:lnRef>
+          <a:fillRef idx="3">
+            <a:schemeClr val="accent1"/>
+          </a:fillRef>
+          <a:effectRef idx="2">
+            <a:schemeClr val="accent1"/>
+          </a:effectRef>
+          <a:fontRef idx="minor">
+            <a:schemeClr val="lt1"/>
+          </a:fontRef>
+        </p:style>
+        <p:txBody>
+          <a:bodyPr rtlCol="0" anchor="ctr" wrap="square" lIns="54864" rIns="54864" tIns="0" bIns="0"/>
           <a:lstStyle/>
           <a:p>
             <a:pPr algn="l">
@@ -9082,249 +8140,29 @@
               </a:spcAft>
             </a:pPr>
             <a:r>
-              <a:rPr sz="800" b="0" i="0">
-                <a:solidFill>
-                  <a:srgbClr val="595959"/>
-                </a:solidFill>
-                <a:latin typeface="맑은 고딕"/>
-                <a:ea typeface="맑은 고딕"/>
-                <a:cs typeface="맑은 고딕"/>
-              </a:rPr>
-              <a:t>누적 KV 캐시</a:t>
-            </a:r>
-          </a:p>
-        </p:txBody>
-      </p:sp>
-      <p:sp>
-        <p:nvSpPr>
-          <p:cNvPr id="9104" name="TextBox 9103"/>
-          <p:cNvSpPr txBox="1"/>
-          <p:nvPr/>
-        </p:nvSpPr>
-        <p:spPr>
-          <a:xfrm>
-            <a:off x="9619488" y="3474720"/>
-            <a:ext cx="1947672" cy="173736"/>
-          </a:xfrm>
-          <a:prstGeom prst="rect">
-            <a:avLst/>
-          </a:prstGeom>
-          <a:noFill/>
-        </p:spPr>
-        <p:txBody>
-          <a:bodyPr wrap="square" lIns="0" rIns="0" tIns="0" bIns="0" anchor="ctr">
-            <a:spAutoFit/>
-          </a:bodyPr>
-          <a:lstStyle/>
-          <a:p>
-            <a:pPr algn="l">
-              <a:lnSpc>
-                <a:spcPct val="100000"/>
-              </a:lnSpc>
-              <a:spcAft>
-                <a:spcPts val="0"/>
-              </a:spcAft>
-            </a:pPr>
-            <a:r>
-              <a:rPr sz="800" b="1" i="0">
-                <a:solidFill>
-                  <a:srgbClr val="595959"/>
-                </a:solidFill>
-                <a:latin typeface="맑은 고딕"/>
-                <a:ea typeface="맑은 고딕"/>
-                <a:cs typeface="맑은 고딕"/>
-              </a:rPr>
-              <a:t>큼 · D 노드에 있음</a:t>
-            </a:r>
-          </a:p>
-        </p:txBody>
-      </p:sp>
-      <p:sp>
-        <p:nvSpPr>
-          <p:cNvPr id="9105" name="TextBox 9104"/>
-          <p:cNvSpPr txBox="1"/>
-          <p:nvPr/>
-        </p:nvSpPr>
-        <p:spPr>
-          <a:xfrm>
-            <a:off x="8558784" y="3657600"/>
-            <a:ext cx="1024128" cy="173736"/>
-          </a:xfrm>
-          <a:prstGeom prst="rect">
-            <a:avLst/>
-          </a:prstGeom>
-          <a:noFill/>
-        </p:spPr>
-        <p:txBody>
-          <a:bodyPr wrap="square" lIns="0" rIns="0" tIns="0" bIns="0" anchor="ctr">
-            <a:spAutoFit/>
-          </a:bodyPr>
-          <a:lstStyle/>
-          <a:p>
-            <a:pPr algn="l">
-              <a:lnSpc>
-                <a:spcPct val="100000"/>
-              </a:lnSpc>
-              <a:spcAft>
-                <a:spcPts val="0"/>
-              </a:spcAft>
-            </a:pPr>
-            <a:r>
-              <a:rPr sz="800" b="0" i="0">
-                <a:solidFill>
-                  <a:srgbClr val="595959"/>
-                </a:solidFill>
-                <a:latin typeface="맑은 고딕"/>
-                <a:ea typeface="맑은 고딕"/>
-                <a:cs typeface="맑은 고딕"/>
-              </a:rPr>
-              <a:t>P 노드 부하</a:t>
-            </a:r>
-          </a:p>
-        </p:txBody>
-      </p:sp>
-      <p:sp>
-        <p:nvSpPr>
-          <p:cNvPr id="9106" name="TextBox 9105"/>
-          <p:cNvSpPr txBox="1"/>
-          <p:nvPr/>
-        </p:nvSpPr>
-        <p:spPr>
-          <a:xfrm>
-            <a:off x="9619488" y="3657600"/>
-            <a:ext cx="1947672" cy="173736"/>
-          </a:xfrm>
-          <a:prstGeom prst="rect">
-            <a:avLst/>
-          </a:prstGeom>
-          <a:noFill/>
-        </p:spPr>
-        <p:txBody>
-          <a:bodyPr wrap="square" lIns="0" rIns="0" tIns="0" bIns="0" anchor="ctr">
-            <a:spAutoFit/>
-          </a:bodyPr>
-          <a:lstStyle/>
-          <a:p>
-            <a:pPr algn="l">
-              <a:lnSpc>
-                <a:spcPct val="100000"/>
-              </a:lnSpc>
-              <a:spcAft>
-                <a:spcPts val="0"/>
-              </a:spcAft>
-            </a:pPr>
-            <a:r>
-              <a:rPr sz="800" b="1" i="0">
-                <a:solidFill>
-                  <a:srgbClr val="548235"/>
-                </a:solidFill>
-                <a:latin typeface="맑은 고딕"/>
-                <a:ea typeface="맑은 고딕"/>
-                <a:cs typeface="맑은 고딕"/>
-              </a:rPr>
-              <a:t>낮음</a:t>
-            </a:r>
-          </a:p>
-        </p:txBody>
-      </p:sp>
-      <p:sp>
-        <p:nvSpPr>
-          <p:cNvPr id="9107" name="TextBox 9106"/>
-          <p:cNvSpPr txBox="1"/>
-          <p:nvPr/>
-        </p:nvSpPr>
-        <p:spPr>
-          <a:xfrm>
-            <a:off x="8558784" y="3840480"/>
-            <a:ext cx="1024128" cy="173736"/>
-          </a:xfrm>
-          <a:prstGeom prst="rect">
-            <a:avLst/>
-          </a:prstGeom>
-          <a:noFill/>
-        </p:spPr>
-        <p:txBody>
-          <a:bodyPr wrap="square" lIns="0" rIns="0" tIns="0" bIns="0" anchor="ctr">
-            <a:spAutoFit/>
-          </a:bodyPr>
-          <a:lstStyle/>
-          <a:p>
-            <a:pPr algn="l">
-              <a:lnSpc>
-                <a:spcPct val="100000"/>
-              </a:lnSpc>
-              <a:spcAft>
-                <a:spcPts val="0"/>
-              </a:spcAft>
-            </a:pPr>
-            <a:r>
-              <a:rPr sz="800" b="0" i="0">
-                <a:solidFill>
-                  <a:srgbClr val="595959"/>
-                </a:solidFill>
-                <a:latin typeface="맑은 고딕"/>
-                <a:ea typeface="맑은 고딕"/>
-                <a:cs typeface="맑은 고딕"/>
-              </a:rPr>
-              <a:t>D 노드 부하</a:t>
-            </a:r>
-          </a:p>
-        </p:txBody>
-      </p:sp>
-      <p:sp>
-        <p:nvSpPr>
-          <p:cNvPr id="9108" name="TextBox 9107"/>
-          <p:cNvSpPr txBox="1"/>
-          <p:nvPr/>
-        </p:nvSpPr>
-        <p:spPr>
-          <a:xfrm>
-            <a:off x="9619488" y="3840480"/>
-            <a:ext cx="1947672" cy="173736"/>
-          </a:xfrm>
-          <a:prstGeom prst="rect">
-            <a:avLst/>
-          </a:prstGeom>
-          <a:noFill/>
-        </p:spPr>
-        <p:txBody>
-          <a:bodyPr wrap="square" lIns="0" rIns="0" tIns="0" bIns="0" anchor="ctr">
-            <a:spAutoFit/>
-          </a:bodyPr>
-          <a:lstStyle/>
-          <a:p>
-            <a:pPr algn="l">
-              <a:lnSpc>
-                <a:spcPct val="100000"/>
-              </a:lnSpc>
-              <a:spcAft>
-                <a:spcPts val="0"/>
-              </a:spcAft>
-            </a:pPr>
-            <a:r>
-              <a:rPr sz="800" b="1" i="0">
-                <a:solidFill>
-                  <a:srgbClr val="C00000"/>
-                </a:solidFill>
-                <a:latin typeface="맑은 고딕"/>
-                <a:ea typeface="맑은 고딕"/>
-                <a:cs typeface="맑은 고딕"/>
-              </a:rPr>
-              <a:t>높음</a:t>
-            </a:r>
-          </a:p>
-        </p:txBody>
-      </p:sp>
-      <p:sp>
-        <p:nvSpPr>
-          <p:cNvPr id="9109" name="Rounded Rectangle 9108"/>
+              <a:rPr sz="100" b="0" i="0">
+                <a:solidFill>
+                  <a:srgbClr val="000000"/>
+                </a:solidFill>
+                <a:latin typeface="맑은 고딕"/>
+                <a:ea typeface="맑은 고딕"/>
+                <a:cs typeface="맑은 고딕"/>
+              </a:rPr>
+              <a:t/>
+            </a:r>
+          </a:p>
+        </p:txBody>
+      </p:sp>
+      <p:sp>
+        <p:nvSpPr>
+          <p:cNvPr id="9082" name="Rounded Rectangle 9081"/>
           <p:cNvSpPr/>
           <p:nvPr/>
         </p:nvSpPr>
         <p:spPr>
           <a:xfrm>
-            <a:off x="8449056" y="4151376"/>
-            <a:ext cx="3227832" cy="384048"/>
+            <a:off x="6803136" y="4151376"/>
+            <a:ext cx="1920240" cy="530352"/>
           </a:xfrm>
           <a:prstGeom prst="roundRect">
             <a:avLst>
@@ -9332,7 +8170,454 @@
             </a:avLst>
           </a:prstGeom>
           <a:solidFill>
+            <a:srgbClr val="DEEBF7"/>
+          </a:solidFill>
+          <a:ln w="12700">
+            <a:solidFill>
+              <a:srgbClr val="2E75B6"/>
+            </a:solidFill>
+          </a:ln>
+          <a:effectLst/>
+        </p:spPr>
+        <p:style>
+          <a:lnRef idx="1">
+            <a:schemeClr val="accent1"/>
+          </a:lnRef>
+          <a:fillRef idx="3">
+            <a:schemeClr val="accent1"/>
+          </a:fillRef>
+          <a:effectRef idx="2">
+            <a:schemeClr val="accent1"/>
+          </a:effectRef>
+          <a:fontRef idx="minor">
+            <a:schemeClr val="lt1"/>
+          </a:fontRef>
+        </p:style>
+        <p:txBody>
+          <a:bodyPr rtlCol="0" anchor="ctr" wrap="square" lIns="54864" rIns="54864" tIns="0" bIns="0"/>
+          <a:lstStyle/>
+          <a:p>
+            <a:pPr algn="ctr">
+              <a:lnSpc>
+                <a:spcPct val="100000"/>
+              </a:lnSpc>
+              <a:spcAft>
+                <a:spcPts val="100"/>
+              </a:spcAft>
+            </a:pPr>
+            <a:r>
+              <a:rPr sz="900" b="1" i="0">
+                <a:solidFill>
+                  <a:srgbClr val="1F3864"/>
+                </a:solidFill>
+                <a:latin typeface="맑은 고딕"/>
+                <a:ea typeface="맑은 고딕"/>
+                <a:cs typeface="맑은 고딕"/>
+              </a:rPr>
+              <a:t>① D에서 그대로 Prefill</a:t>
+            </a:r>
+          </a:p>
+          <a:p>
+            <a:pPr algn="ctr">
+              <a:lnSpc>
+                <a:spcPct val="100000"/>
+              </a:lnSpc>
+              <a:spcAft>
+                <a:spcPts val="0"/>
+              </a:spcAft>
+            </a:pPr>
+            <a:r>
+              <a:rPr sz="700" b="0" i="0">
+                <a:solidFill>
+                  <a:srgbClr val="595959"/>
+                </a:solidFill>
+                <a:latin typeface="맑은 고딕"/>
+                <a:ea typeface="맑은 고딕"/>
+                <a:cs typeface="맑은 고딕"/>
+              </a:rPr>
+              <a:t>ΔInput 작을 때 유리</a:t>
+            </a:r>
+          </a:p>
+        </p:txBody>
+      </p:sp>
+      <p:sp>
+        <p:nvSpPr>
+          <p:cNvPr id="9083" name="Rounded Rectangle 9082"/>
+          <p:cNvSpPr/>
+          <p:nvPr/>
+        </p:nvSpPr>
+        <p:spPr>
+          <a:xfrm>
+            <a:off x="8869680" y="4114800"/>
+            <a:ext cx="2834640" cy="603504"/>
+          </a:xfrm>
+          <a:prstGeom prst="roundRect">
+            <a:avLst>
+              <a:gd name="adj" fmla="val 6000"/>
+            </a:avLst>
+          </a:prstGeom>
+          <a:solidFill>
+            <a:srgbClr val="FFFFFF"/>
+          </a:solidFill>
+          <a:ln w="9525">
+            <a:solidFill>
+              <a:srgbClr val="2E75B6"/>
+            </a:solidFill>
+          </a:ln>
+          <a:effectLst/>
+        </p:spPr>
+        <p:style>
+          <a:lnRef idx="1">
+            <a:schemeClr val="accent1"/>
+          </a:lnRef>
+          <a:fillRef idx="3">
+            <a:schemeClr val="accent1"/>
+          </a:fillRef>
+          <a:effectRef idx="2">
+            <a:schemeClr val="accent1"/>
+          </a:effectRef>
+          <a:fontRef idx="minor">
+            <a:schemeClr val="lt1"/>
+          </a:fontRef>
+        </p:style>
+        <p:txBody>
+          <a:bodyPr rtlCol="0" anchor="ctr" wrap="square" lIns="64008" rIns="64008" tIns="0" bIns="0"/>
+          <a:lstStyle/>
+          <a:p>
+            <a:pPr algn="l">
+              <a:lnSpc>
+                <a:spcPct val="100000"/>
+              </a:lnSpc>
+              <a:spcAft>
+                <a:spcPts val="200"/>
+              </a:spcAft>
+            </a:pPr>
+            <a:r>
+              <a:rPr sz="750" b="1" i="0">
+                <a:solidFill>
+                  <a:srgbClr val="2E75B6"/>
+                </a:solidFill>
+                <a:latin typeface="맑은 고딕"/>
+                <a:ea typeface="맑은 고딕"/>
+                <a:cs typeface="맑은 고딕"/>
+              </a:rPr>
+              <a:t>＋ KV 이동 비용 0</a:t>
+            </a:r>
+          </a:p>
+          <a:p>
+            <a:pPr algn="l">
+              <a:lnSpc>
+                <a:spcPct val="100000"/>
+              </a:lnSpc>
+              <a:spcAft>
+                <a:spcPts val="0"/>
+              </a:spcAft>
+            </a:pPr>
+            <a:r>
+              <a:rPr sz="750" b="0" i="0">
+                <a:solidFill>
+                  <a:srgbClr val="595959"/>
+                </a:solidFill>
+                <a:latin typeface="맑은 고딕"/>
+                <a:ea typeface="맑은 고딕"/>
+                <a:cs typeface="맑은 고딕"/>
+              </a:rPr>
+              <a:t>－ 진행 중인 Decode와 자원 경합 → 응답 지연</a:t>
+            </a:r>
+          </a:p>
+        </p:txBody>
+      </p:sp>
+      <p:sp>
+        <p:nvSpPr>
+          <p:cNvPr id="9084" name="Up Arrow 9083"/>
+          <p:cNvSpPr/>
+          <p:nvPr/>
+        </p:nvSpPr>
+        <p:spPr>
+          <a:xfrm>
+            <a:off x="5907024" y="3273552"/>
+            <a:ext cx="201168" cy="859536"/>
+          </a:xfrm>
+          <a:prstGeom prst="upArrow">
+            <a:avLst/>
+          </a:prstGeom>
+          <a:solidFill>
+            <a:srgbClr val="E06666"/>
+          </a:solidFill>
+          <a:ln>
+            <a:noFill/>
+          </a:ln>
+          <a:effectLst/>
+        </p:spPr>
+        <p:style>
+          <a:lnRef idx="1">
+            <a:schemeClr val="accent1"/>
+          </a:lnRef>
+          <a:fillRef idx="3">
+            <a:schemeClr val="accent1"/>
+          </a:fillRef>
+          <a:effectRef idx="2">
+            <a:schemeClr val="accent1"/>
+          </a:effectRef>
+          <a:fontRef idx="minor">
+            <a:schemeClr val="lt1"/>
+          </a:fontRef>
+        </p:style>
+        <p:txBody>
+          <a:bodyPr rtlCol="0" anchor="ctr" wrap="square" lIns="54864" rIns="54864" tIns="0" bIns="0"/>
+          <a:lstStyle/>
+          <a:p>
+            <a:pPr algn="l">
+              <a:lnSpc>
+                <a:spcPct val="100000"/>
+              </a:lnSpc>
+              <a:spcAft>
+                <a:spcPts val="0"/>
+              </a:spcAft>
+            </a:pPr>
+            <a:r>
+              <a:rPr sz="100" b="0" i="0">
+                <a:solidFill>
+                  <a:srgbClr val="000000"/>
+                </a:solidFill>
+                <a:latin typeface="맑은 고딕"/>
+                <a:ea typeface="맑은 고딕"/>
+                <a:cs typeface="맑은 고딕"/>
+              </a:rPr>
+              <a:t/>
+            </a:r>
+          </a:p>
+        </p:txBody>
+      </p:sp>
+      <p:sp>
+        <p:nvSpPr>
+          <p:cNvPr id="9085" name="Rectangle 9084"/>
+          <p:cNvSpPr/>
+          <p:nvPr/>
+        </p:nvSpPr>
+        <p:spPr>
+          <a:xfrm>
+            <a:off x="6144768" y="3630168"/>
+            <a:ext cx="896112" cy="182880"/>
+          </a:xfrm>
+          <a:prstGeom prst="rect">
+            <a:avLst/>
+          </a:prstGeom>
+          <a:solidFill>
+            <a:srgbClr val="FFFFFF"/>
+          </a:solidFill>
+          <a:ln>
+            <a:noFill/>
+          </a:ln>
+          <a:effectLst/>
+        </p:spPr>
+        <p:style>
+          <a:lnRef idx="1">
+            <a:schemeClr val="accent1"/>
+          </a:lnRef>
+          <a:fillRef idx="3">
+            <a:schemeClr val="accent1"/>
+          </a:fillRef>
+          <a:effectRef idx="2">
+            <a:schemeClr val="accent1"/>
+          </a:effectRef>
+          <a:fontRef idx="minor">
+            <a:schemeClr val="lt1"/>
+          </a:fontRef>
+        </p:style>
+        <p:txBody>
+          <a:bodyPr rtlCol="0" anchor="ctr" wrap="square" lIns="18288" rIns="18288" tIns="0" bIns="0"/>
+          <a:lstStyle/>
+          <a:p>
+            <a:pPr algn="ctr">
+              <a:lnSpc>
+                <a:spcPct val="100000"/>
+              </a:lnSpc>
+              <a:spcAft>
+                <a:spcPts val="0"/>
+              </a:spcAft>
+            </a:pPr>
+            <a:r>
+              <a:rPr sz="700" b="1" i="0">
+                <a:solidFill>
+                  <a:srgbClr val="C00000"/>
+                </a:solidFill>
+                <a:latin typeface="맑은 고딕"/>
+                <a:ea typeface="맑은 고딕"/>
+                <a:cs typeface="맑은 고딕"/>
+              </a:rPr>
+              <a:t>KV 캐시 전송</a:t>
+            </a:r>
+          </a:p>
+        </p:txBody>
+      </p:sp>
+      <p:sp>
+        <p:nvSpPr>
+          <p:cNvPr id="9086" name="Right Arrow 9085"/>
+          <p:cNvSpPr/>
+          <p:nvPr/>
+        </p:nvSpPr>
+        <p:spPr>
+          <a:xfrm>
+            <a:off x="6163056" y="2971800"/>
+            <a:ext cx="548640" cy="146304"/>
+          </a:xfrm>
+          <a:prstGeom prst="rightArrow">
+            <a:avLst/>
+          </a:prstGeom>
+          <a:solidFill>
+            <a:srgbClr val="ED7D31"/>
+          </a:solidFill>
+          <a:ln>
+            <a:noFill/>
+          </a:ln>
+          <a:effectLst/>
+        </p:spPr>
+        <p:style>
+          <a:lnRef idx="1">
+            <a:schemeClr val="accent1"/>
+          </a:lnRef>
+          <a:fillRef idx="3">
+            <a:schemeClr val="accent1"/>
+          </a:fillRef>
+          <a:effectRef idx="2">
+            <a:schemeClr val="accent1"/>
+          </a:effectRef>
+          <a:fontRef idx="minor">
+            <a:schemeClr val="lt1"/>
+          </a:fontRef>
+        </p:style>
+        <p:txBody>
+          <a:bodyPr rtlCol="0" anchor="ctr" wrap="square" lIns="54864" rIns="54864" tIns="0" bIns="0"/>
+          <a:lstStyle/>
+          <a:p>
+            <a:pPr algn="l">
+              <a:lnSpc>
+                <a:spcPct val="100000"/>
+              </a:lnSpc>
+              <a:spcAft>
+                <a:spcPts val="0"/>
+              </a:spcAft>
+            </a:pPr>
+            <a:r>
+              <a:rPr sz="100" b="0" i="0">
+                <a:solidFill>
+                  <a:srgbClr val="000000"/>
+                </a:solidFill>
+                <a:latin typeface="맑은 고딕"/>
+                <a:ea typeface="맑은 고딕"/>
+                <a:cs typeface="맑은 고딕"/>
+              </a:rPr>
+              <a:t/>
+            </a:r>
+          </a:p>
+        </p:txBody>
+      </p:sp>
+      <p:sp>
+        <p:nvSpPr>
+          <p:cNvPr id="9087" name="Rounded Rectangle 9086"/>
+          <p:cNvSpPr/>
+          <p:nvPr/>
+        </p:nvSpPr>
+        <p:spPr>
+          <a:xfrm>
+            <a:off x="6803136" y="2779776"/>
+            <a:ext cx="1920240" cy="530352"/>
+          </a:xfrm>
+          <a:prstGeom prst="roundRect">
+            <a:avLst>
+              <a:gd name="adj" fmla="val 10000"/>
+            </a:avLst>
+          </a:prstGeom>
+          <a:solidFill>
             <a:srgbClr val="FBE5D6"/>
+          </a:solidFill>
+          <a:ln w="12700">
+            <a:solidFill>
+              <a:srgbClr val="ED7D31"/>
+            </a:solidFill>
+          </a:ln>
+          <a:effectLst/>
+        </p:spPr>
+        <p:style>
+          <a:lnRef idx="1">
+            <a:schemeClr val="accent1"/>
+          </a:lnRef>
+          <a:fillRef idx="3">
+            <a:schemeClr val="accent1"/>
+          </a:fillRef>
+          <a:effectRef idx="2">
+            <a:schemeClr val="accent1"/>
+          </a:effectRef>
+          <a:fontRef idx="minor">
+            <a:schemeClr val="lt1"/>
+          </a:fontRef>
+        </p:style>
+        <p:txBody>
+          <a:bodyPr rtlCol="0" anchor="ctr" wrap="square" lIns="54864" rIns="54864" tIns="0" bIns="0"/>
+          <a:lstStyle/>
+          <a:p>
+            <a:pPr algn="ctr">
+              <a:lnSpc>
+                <a:spcPct val="100000"/>
+              </a:lnSpc>
+              <a:spcAft>
+                <a:spcPts val="100"/>
+              </a:spcAft>
+            </a:pPr>
+            <a:r>
+              <a:rPr sz="900" b="1" i="0">
+                <a:solidFill>
+                  <a:srgbClr val="C55A11"/>
+                </a:solidFill>
+                <a:latin typeface="맑은 고딕"/>
+                <a:ea typeface="맑은 고딕"/>
+                <a:cs typeface="맑은 고딕"/>
+              </a:rPr>
+              <a:t>② KV를 P로 보내 Prefill</a:t>
+            </a:r>
+          </a:p>
+          <a:p>
+            <a:pPr algn="ctr">
+              <a:lnSpc>
+                <a:spcPct val="100000"/>
+              </a:lnSpc>
+              <a:spcAft>
+                <a:spcPts val="0"/>
+              </a:spcAft>
+            </a:pPr>
+            <a:r>
+              <a:rPr sz="700" b="0" i="0">
+                <a:solidFill>
+                  <a:srgbClr val="595959"/>
+                </a:solidFill>
+                <a:latin typeface="맑은 고딕"/>
+                <a:ea typeface="맑은 고딕"/>
+                <a:cs typeface="맑은 고딕"/>
+              </a:rPr>
+              <a:t>ΔInput 크거나 D 혼잡 시 유리</a:t>
+            </a:r>
+          </a:p>
+        </p:txBody>
+      </p:sp>
+      <p:sp>
+        <p:nvSpPr>
+          <p:cNvPr id="9088" name="Rounded Rectangle 9087"/>
+          <p:cNvSpPr/>
+          <p:nvPr/>
+        </p:nvSpPr>
+        <p:spPr>
+          <a:xfrm>
+            <a:off x="8869680" y="2743200"/>
+            <a:ext cx="2834640" cy="603504"/>
+          </a:xfrm>
+          <a:prstGeom prst="roundRect">
+            <a:avLst>
+              <a:gd name="adj" fmla="val 6000"/>
+            </a:avLst>
+          </a:prstGeom>
+          <a:solidFill>
+            <a:srgbClr val="FFFFFF"/>
           </a:solidFill>
           <a:ln w="9525">
             <a:solidFill>
@@ -9356,10 +8641,31 @@
           </a:fontRef>
         </p:style>
         <p:txBody>
-          <a:bodyPr rtlCol="0" anchor="ctr" wrap="square" lIns="54864" rIns="54864" tIns="0" bIns="0"/>
-          <a:lstStyle/>
-          <a:p>
-            <a:pPr algn="ctr">
+          <a:bodyPr rtlCol="0" anchor="ctr" wrap="square" lIns="64008" rIns="64008" tIns="0" bIns="0"/>
+          <a:lstStyle/>
+          <a:p>
+            <a:pPr algn="l">
+              <a:lnSpc>
+                <a:spcPct val="100000"/>
+              </a:lnSpc>
+              <a:spcAft>
+                <a:spcPts val="200"/>
+              </a:spcAft>
+            </a:pPr>
+            <a:r>
+              <a:rPr sz="750" b="1" i="0">
+                <a:solidFill>
+                  <a:srgbClr val="C00000"/>
+                </a:solidFill>
+                <a:latin typeface="맑은 고딕"/>
+                <a:ea typeface="맑은 고딕"/>
+                <a:cs typeface="맑은 고딕"/>
+              </a:rPr>
+              <a:t>＋ History KV 전송 비용 발생</a:t>
+            </a:r>
+          </a:p>
+          <a:p>
+            <a:pPr algn="l">
               <a:lnSpc>
                 <a:spcPct val="100000"/>
               </a:lnSpc>
@@ -9368,62 +8674,7 @@
               </a:spcAft>
             </a:pPr>
             <a:r>
-              <a:rPr sz="1000" b="1" i="0">
-                <a:solidFill>
-                  <a:srgbClr val="C55A11"/>
-                </a:solidFill>
-                <a:latin typeface="맑은 고딕"/>
-                <a:ea typeface="맑은 고딕"/>
-                <a:cs typeface="맑은 고딕"/>
-              </a:rPr>
-              <a:t>→ </a:t>
-            </a:r>
-            <a:r>
-              <a:rPr sz="1050" b="1" i="0">
-                <a:solidFill>
-                  <a:srgbClr val="C55A11"/>
-                </a:solidFill>
-                <a:latin typeface="맑은 고딕"/>
-                <a:ea typeface="맑은 고딕"/>
-                <a:cs typeface="맑은 고딕"/>
-              </a:rPr>
-              <a:t>P 노드에서 Prefill</a:t>
-            </a:r>
-          </a:p>
-        </p:txBody>
-      </p:sp>
-      <p:sp>
-        <p:nvSpPr>
-          <p:cNvPr id="9110" name="TextBox 9109"/>
-          <p:cNvSpPr txBox="1"/>
-          <p:nvPr/>
-        </p:nvSpPr>
-        <p:spPr>
-          <a:xfrm>
-            <a:off x="8449056" y="4608576"/>
-            <a:ext cx="3227832" cy="402336"/>
-          </a:xfrm>
-          <a:prstGeom prst="rect">
-            <a:avLst/>
-          </a:prstGeom>
-          <a:noFill/>
-        </p:spPr>
-        <p:txBody>
-          <a:bodyPr wrap="square" lIns="0" rIns="0" tIns="0" bIns="0" anchor="t">
-            <a:spAutoFit/>
-          </a:bodyPr>
-          <a:lstStyle/>
-          <a:p>
-            <a:pPr algn="l">
-              <a:lnSpc>
-                <a:spcPct val="120000"/>
-              </a:lnSpc>
-              <a:spcAft>
-                <a:spcPts val="0"/>
-              </a:spcAft>
-            </a:pPr>
-            <a:r>
-              <a:rPr sz="800" b="0" i="0">
+              <a:rPr sz="750" b="0" i="0">
                 <a:solidFill>
                   <a:srgbClr val="595959"/>
                 </a:solidFill>
@@ -9431,25 +8682,25 @@
                 <a:ea typeface="맑은 고딕"/>
                 <a:cs typeface="맑은 고딕"/>
               </a:rPr>
-              <a:t>무거운 Prefill을 D에서 하면 진행 중인 Decode가 끊김 → 한가한 P로 보내는 편이 이득</a:t>
-            </a:r>
-          </a:p>
-        </p:txBody>
-      </p:sp>
-      <p:sp>
-        <p:nvSpPr>
-          <p:cNvPr id="9111" name="Rounded Rectangle 9110"/>
+              <a:t>－ D의 Decode를 방해하지 않고 P 연산 자원 활용</a:t>
+            </a:r>
+          </a:p>
+        </p:txBody>
+      </p:sp>
+      <p:sp>
+        <p:nvSpPr>
+          <p:cNvPr id="9089" name="Rounded Rectangle 9088"/>
           <p:cNvSpPr/>
           <p:nvPr/>
         </p:nvSpPr>
         <p:spPr>
           <a:xfrm>
-            <a:off x="347472" y="5175504"/>
-            <a:ext cx="11494008" cy="347472"/>
+            <a:off x="347472" y="5029200"/>
+            <a:ext cx="11494008" cy="438912"/>
           </a:xfrm>
           <a:prstGeom prst="roundRect">
             <a:avLst>
-              <a:gd name="adj" fmla="val 12000"/>
+              <a:gd name="adj" fmla="val 10000"/>
             </a:avLst>
           </a:prstGeom>
           <a:solidFill>
@@ -9489,7 +8740,7 @@
               </a:spcAft>
             </a:pPr>
             <a:r>
-              <a:rPr sz="1000" b="0" i="0">
+              <a:rPr sz="950" b="0" i="0">
                 <a:solidFill>
                   <a:srgbClr val="000000"/>
                 </a:solidFill>
@@ -9497,10 +8748,10 @@
                 <a:ea typeface="맑은 고딕"/>
                 <a:cs typeface="맑은 고딕"/>
               </a:rPr>
-              <a:t>같은 대화인데도 Turn마다 </a:t>
-            </a:r>
-            <a:r>
-              <a:rPr sz="1000" b="1" i="0">
+              <a:t>①과 ② 중 어느 쪽이 싼지는 </a:t>
+            </a:r>
+            <a:r>
+              <a:rPr sz="950" b="1" i="0">
                 <a:solidFill>
                   <a:srgbClr val="C00000"/>
                 </a:solidFill>
@@ -9508,10 +8759,10 @@
                 <a:ea typeface="맑은 고딕"/>
                 <a:cs typeface="맑은 고딕"/>
               </a:rPr>
-              <a:t>입력 크기 · KV 캐시 위치 · 노드 부하</a:t>
-            </a:r>
-            <a:r>
-              <a:rPr sz="1000" b="0" i="0">
+              <a:t>Tool 결과 크기 · History KV 크기 · P/D 노드 부하</a:t>
+            </a:r>
+            <a:r>
+              <a:rPr sz="950" b="0" i="0">
                 <a:solidFill>
                   <a:srgbClr val="000000"/>
                 </a:solidFill>
@@ -9519,7 +8770,7 @@
                 <a:ea typeface="맑은 고딕"/>
                 <a:cs typeface="맑은 고딕"/>
               </a:rPr>
-              <a:t>가 달라져, 유리한 Prefill 실행 위치가 매번 바뀜</a:t>
+              <a:t>에 따라 매 Turn 뒤바뀜 → 고정된 규칙 하나로는 대응 불가</a:t>
             </a:r>
           </a:p>
         </p:txBody>
